--- a/MASVN_RS_WM_2H26_outlook_Equity_VN_2026_STBFPT_24July2026.pptx
+++ b/MASVN_RS_WM_2H26_outlook_Equity_VN_2026_STBFPT_24July2026.pptx
@@ -29681,7 +29681,7 @@
                 <a:ea typeface="Noto Sans" panose="020B0502040504020204" pitchFamily="34" charset="0"/>
                 <a:cs typeface="Noto Sans" panose="020B0502040504020204" pitchFamily="34" charset="0"/>
               </a:rPr>
-              <a:t>Revenue reached VND 26,269bn (+12.6% YoY) and PBT VND 5,714bn (+18.1% YoY), completing 45%/49% of the FY26 plan; 2Q26 PBT was VND 2,910bn (+14% YoY). Technology remained the engine: revenue of VND 23,138bn (+15% YoY; 88% of group revenue) and PBT of VND 3,314bn (+16.9% YoY), with Global IT +13.4% and Domestic IT +22.5% in 6M26 on AI/digital-transformation demand and government digitalization spend. Education, investment &amp; others posted VND 3,131bn (-2.1% YoY).</a:t>
+              <a:t>Revenue reached VND 26,269bn (+12.6% YoY) and PBT VND 5,714bn (+18.1% YoY), completing 45%/49% of the FY26 plan; 2Q26 PBT was VND 2,910bn, with NPATMI of VND 2,568bn (+14% YoY; revenue -17% YoY on the basis change). Technology remained the engine: revenue of VND 23,138bn (+15% YoY; 88% of group revenue) and PBT of VND 3,314bn (+16.9% YoY), with Global IT +13.4% and Domestic IT +22.5% in 6M26 on AI/digital-transformation demand and government digitalization spend. Education, investment &amp; others posted VND 3,131bn (-2.1% YoY).</a:t>
             </a:r>
             <a:endParaRPr kumimoji="1" lang="en-US" altLang="ko-KR" sz="800" b="1" dirty="0">
               <a:solidFill>
@@ -38009,7 +38009,7 @@
                 <a:ea typeface="Noto Sans" panose="020B0502040504020204" pitchFamily="34" charset="0"/>
                 <a:cs typeface="Noto Sans" panose="020B0502040504020204" pitchFamily="34" charset="0"/>
               </a:rPr>
-              <a:t>Doanh thu đạt 26,269 tỷ đồng (+12.6% CK), LNTT 5,714 tỷ đồng (+18.1% CK), hoàn thành 45%/49% kế hoạch năm; LNTT Q2/2026 đạt 2,910 tỷ đồng (+14% CK). Khối Công nghệ tiếp tục là động lực chính: doanh thu 23,138 tỷ đồng (+15% CK; 88% doanh thu toàn tập đoàn), LNTT 3,314 tỷ đồng (+16.9% CK); CNTT nước ngoài +13.4% và CNTT trong nước +22.5% trong 6T26 nhờ nhu cầu AI/chuyển đổi số và chi tiêu số hóa của khối chính phủ. Mảng Giáo dục, đầu tư &amp; khác đạt 3,131 tỷ đồng (-2.1% CK).</a:t>
+              <a:t>Doanh thu đạt 26,269 tỷ đồng (+12.6% CK), LNTT 5,714 tỷ đồng (+18.1% CK), hoàn thành 45%/49% kế hoạch năm; LNTT Q2/2026 đạt 2,910 tỷ đồng, LNST-CĐTS đạt 2,568 tỷ đồng (+14% CK; doanh thu -17% CK do thay đổi chuẩn hợp nhất). Khối Công nghệ tiếp tục là động lực chính: doanh thu 23,138 tỷ đồng (+15% CK; 88% doanh thu toàn tập đoàn), LNTT 3,314 tỷ đồng (+16.9% CK); CNTT nước ngoài +13.4% và CNTT trong nước +22.5% trong 6T26 nhờ nhu cầu AI/chuyển đổi số và chi tiêu số hóa của khối chính phủ. Mảng Giáo dục, đầu tư &amp; khác đạt 3,131 tỷ đồng (-2.1% CK).</a:t>
             </a:r>
           </a:p>
           <a:p>

--- a/MASVN_RS_WM_2H26_outlook_Equity_VN_2026_STBFPT_24July2026.pptx
+++ b/MASVN_RS_WM_2H26_outlook_Equity_VN_2026_STBFPT_24July2026.pptx
@@ -29681,7 +29681,7 @@
                 <a:ea typeface="Noto Sans" panose="020B0502040504020204" pitchFamily="34" charset="0"/>
                 <a:cs typeface="Noto Sans" panose="020B0502040504020204" pitchFamily="34" charset="0"/>
               </a:rPr>
-              <a:t>Revenue reached VND 26,269bn (+12.6% YoY) and PBT VND 5,714bn (+18.1% YoY), completing 45%/49% of the FY26 plan; 2Q26 PBT was VND 2,910bn, with NPATMI of VND 2,568bn (+14% YoY; revenue -17% YoY on the basis change). Technology remained the engine: revenue of VND 23,138bn (+15% YoY; 88% of group revenue) and PBT of VND 3,314bn (+16.9% YoY), with Global IT +13.4% and Domestic IT +22.5% in 6M26 on AI/digital-transformation demand and government digitalization spend. Education, investment &amp; others posted VND 3,131bn (-2.1% YoY).</a:t>
+              <a:t>1H26 (cumulative): revenue VND 26,269bn (+12.6% YoY) and PBT VND 5,714bn (+18.1% YoY), completing 45%/49% of the FY26 revenue/PBT plan. 2Q26 alone: revenue VND 13,789bn, PBT VND 2,910bn (vs VND 12,480bn / VND 2,804bn in 1Q26) and NPATMI VND 2,568bn (+14% YoY); reported 2Q26 revenue fell 17% YoY purely on the Telecom deconsolidation. By segment (1H26): Technology revenue VND 23,138bn (+15% YoY; 88% of group revenue) and PBT VND 3,314bn (+16.9% YoY), with Global IT +13.4% and Domestic IT +22.5%; Education, investment &amp; others VND 3,131bn (-2.1% YoY).</a:t>
             </a:r>
             <a:endParaRPr kumimoji="1" lang="en-US" altLang="ko-KR" sz="800" b="1" dirty="0">
               <a:solidFill>
@@ -38009,7 +38009,7 @@
                 <a:ea typeface="Noto Sans" panose="020B0502040504020204" pitchFamily="34" charset="0"/>
                 <a:cs typeface="Noto Sans" panose="020B0502040504020204" pitchFamily="34" charset="0"/>
               </a:rPr>
-              <a:t>Doanh thu đạt 26,269 tỷ đồng (+12.6% CK), LNTT 5,714 tỷ đồng (+18.1% CK), hoàn thành 45%/49% kế hoạch năm; LNTT Q2/2026 đạt 2,910 tỷ đồng, LNST-CĐTS đạt 2,568 tỷ đồng (+14% CK; doanh thu -17% CK do thay đổi chuẩn hợp nhất). Khối Công nghệ tiếp tục là động lực chính: doanh thu 23,138 tỷ đồng (+15% CK; 88% doanh thu toàn tập đoàn), LNTT 3,314 tỷ đồng (+16.9% CK); CNTT nước ngoài +13.4% và CNTT trong nước +22.5% trong 6T26 nhờ nhu cầu AI/chuyển đổi số và chi tiêu số hóa của khối chính phủ. Mảng Giáo dục, đầu tư &amp; khác đạt 3,131 tỷ đồng (-2.1% CK).</a:t>
+              <a:t>Lũy kế 1H26: doanh thu 26,269 tỷ đồng (+12.6% CK), LNTT 5,714 tỷ đồng (+18.1% CK), hoàn thành 45%/49% kế hoạch doanh thu/LNTT năm 2026. Riêng Q2/2026: doanh thu 13,789 tỷ đồng, LNTT 2,910 tỷ đồng (so với 12,480 tỷ / 2,804 tỷ trong Q1/2026), LNST-CĐTS 2,568 tỷ đồng (+14% CK); doanh thu Q2/2026 giảm 17% CK hoàn toàn do FPT Telecom không còn hợp nhất. Theo mảng (1H26): khối Công nghệ đạt doanh thu 23,138 tỷ đồng (+15% CK; 88% doanh thu toàn tập đoàn), LNTT 3,314 tỷ đồng (+16.9% CK); CNTT nước ngoài +13.4%, CNTT trong nước +22.5%; mảng Giáo dục, đầu tư &amp; khác đạt 3,131 tỷ đồng (-2.1% CK).</a:t>
             </a:r>
           </a:p>
           <a:p>

--- a/MASVN_RS_WM_2H26_outlook_Equity_VN_2026_STBFPT_24July2026.pptx
+++ b/MASVN_RS_WM_2H26_outlook_Equity_VN_2026_STBFPT_24July2026.pptx
@@ -28155,7 +28155,7 @@
                           <a:ea typeface="Noto Sans" panose="020B0502040504020204" pitchFamily="34" charset="0"/>
                           <a:cs typeface="Noto Sans" panose="020B0502040504020204" pitchFamily="34" charset="0"/>
                         </a:rPr>
-                        <a:t>10,555</a:t>
+                        <a:t>10,898</a:t>
                       </a:r>
                     </a:p>
                   </a:txBody>
@@ -28320,7 +28320,7 @@
                           <a:ea typeface="Noto Sans" panose="020B0502040504020204" pitchFamily="34" charset="0"/>
                           <a:cs typeface="Noto Sans" panose="020B0502040504020204" pitchFamily="34" charset="0"/>
                         </a:rPr>
-                        <a:t>14.9</a:t>
+                        <a:t>18.7</a:t>
                       </a:r>
                     </a:p>
                   </a:txBody>
@@ -28404,7 +28404,7 @@
                           <a:ea typeface="Noto Sans" panose="020B0502040504020204" pitchFamily="34" charset="0"/>
                           <a:cs typeface="Noto Sans" panose="020B0502040504020204" pitchFamily="34" charset="0"/>
                         </a:rPr>
-                        <a:t>15.7</a:t>
+                        <a:t>15.2</a:t>
                       </a:r>
                     </a:p>
                   </a:txBody>
@@ -29726,7 +29726,7 @@
                 <a:ea typeface="Noto Sans" panose="020B0502040504020204" pitchFamily="34" charset="0"/>
                 <a:cs typeface="Noto Sans" panose="020B0502040504020204" pitchFamily="34" charset="0"/>
               </a:rPr>
-              <a:t>From FY26, FPT Telecom is accounted for under the equity method (2025 restated for comparison). Reported revenue therefore steps down (FY26F: VND 57,195bn) while associate income (~VND 2.9tn in FY26F) flows through the equity-method line — lifting net margin to ~19% and reducing minority leakage, so EPS grows faster than NPATMI (FY26F: +14.9% vs +11.5%).</a:t>
+              <a:t>From FY26, FPT Telecom is accounted for under the equity method (2025 restated for comparison). Reported revenue therefore steps down (FY26F: VND 57,195bn) while associate income (~VND 2.9tn in FY26F) flows through the equity-method line — lifting net margin to ~19% and reducing minority leakage, so EPS grows faster than NPATMI (FY26F: +18.7% vs +15.2%).</a:t>
             </a:r>
             <a:endParaRPr kumimoji="1" lang="en-US" altLang="ko-KR" sz="800" b="1" dirty="0">
               <a:solidFill>
@@ -29771,7 +29771,7 @@
                 <a:ea typeface="Noto Sans" panose="020B0502040504020204" pitchFamily="34" charset="0"/>
                 <a:cs typeface="Noto Sans" panose="020B0502040504020204" pitchFamily="34" charset="0"/>
               </a:rPr>
-              <a:t>We forecast FY26F NPATMI of VND 10,555bn (+11.5% YoY) and FY27F of VND 12,447bn (+17.9% YoY), driven by a Global IT growth reacceleration (FY27F: +16.7%). Our DCF (FCFF)-based target price is VND 91,570; at the current two-year-low price of VND 62,900 (24/07/26), FPT trades at just 10.8x 2026F P/E versus a 5-year median above 18x, implying a 46% expected return (BUY). Risks: soft US/global IT spending, tariff-related deal delays, and JPY/USD FX swings.</a:t>
+              <a:t>We forecast FY26F NPATMI of VND 10,898bn (+15.2% YoY) and FY27F of VND 12,642bn (+16.0% YoY), driven by a Global IT growth reacceleration (FY27F: +16.7%). Our DCF (FCFF)-based target price is VND 91,570; at the current two-year-low price of VND 62,900 (24/07/26), FPT trades at just 10.4x 2026F P/E versus a 5-year median above 18x, implying a 46% expected return (BUY). Risks: soft US/global IT spending, tariff-related deal delays, and JPY/USD FX swings.</a:t>
             </a:r>
           </a:p>
           <a:p>
@@ -30851,7 +30851,7 @@
                           <a:effectLst/>
                           <a:latin typeface="Noto Sans" panose="020B0502040504020204" pitchFamily="34" charset="0"/>
                         </a:rPr>
-                        <a:t>9,257</a:t>
+                        <a:t>9,757</a:t>
                       </a:r>
                     </a:p>
                   </a:txBody>
@@ -30897,7 +30897,7 @@
                           <a:effectLst/>
                           <a:latin typeface="Noto Sans" panose="020B0502040504020204" pitchFamily="34" charset="0"/>
                         </a:rPr>
-                        <a:t>10,601</a:t>
+                        <a:t>10,802</a:t>
                       </a:r>
                     </a:p>
                   </a:txBody>
@@ -31177,7 +31177,7 @@
                           <a:effectLst/>
                           <a:latin typeface="Noto Sans" panose="020B0502040504020204" pitchFamily="34" charset="0"/>
                         </a:rPr>
-                        <a:t>12,770</a:t>
+                        <a:t>13,016</a:t>
                       </a:r>
                     </a:p>
                   </a:txBody>
@@ -31226,7 +31226,7 @@
                           <a:effectLst/>
                           <a:latin typeface="Noto Sans" panose="020B0502040504020204" pitchFamily="34" charset="0"/>
                         </a:rPr>
-                        <a:t>14,796</a:t>
+                        <a:t>15,121</a:t>
                       </a:r>
                     </a:p>
                   </a:txBody>
@@ -31272,7 +31272,7 @@
                           <a:effectLst/>
                           <a:latin typeface="Noto Sans" panose="020B0502040504020204" pitchFamily="34" charset="0"/>
                         </a:rPr>
-                        <a:t>16,989</a:t>
+                        <a:t>17,015</a:t>
                       </a:r>
                     </a:p>
                   </a:txBody>
@@ -31509,7 +31509,7 @@
                           <a:effectLst/>
                           <a:latin typeface="Noto Sans" panose="020B0502040504020204" pitchFamily="34" charset="0"/>
                         </a:rPr>
-                        <a:t>10,555</a:t>
+                        <a:t>10,898</a:t>
                       </a:r>
                     </a:p>
                   </a:txBody>
@@ -31558,7 +31558,7 @@
                           <a:effectLst/>
                           <a:latin typeface="Noto Sans" panose="020B0502040504020204" pitchFamily="34" charset="0"/>
                         </a:rPr>
-                        <a:t>12,447</a:t>
+                        <a:t>12,642</a:t>
                       </a:r>
                     </a:p>
                   </a:txBody>
@@ -31604,7 +31604,7 @@
                           <a:effectLst/>
                           <a:latin typeface="Noto Sans" panose="020B0502040504020204" pitchFamily="34" charset="0"/>
                         </a:rPr>
-                        <a:t>14,204</a:t>
+                        <a:t>14,225</a:t>
                       </a:r>
                     </a:p>
                   </a:txBody>
@@ -31841,7 +31841,7 @@
                           <a:effectLst/>
                           <a:latin typeface="Noto Sans" panose="020B0502040504020204" pitchFamily="34" charset="0"/>
                         </a:rPr>
-                        <a:t>5,831</a:t>
+                        <a:t>6,021</a:t>
                       </a:r>
                     </a:p>
                   </a:txBody>
@@ -31890,7 +31890,7 @@
                           <a:effectLst/>
                           <a:latin typeface="Noto Sans" panose="020B0502040504020204" pitchFamily="34" charset="0"/>
                         </a:rPr>
-                        <a:t>6,877</a:t>
+                        <a:t>6,984</a:t>
                       </a:r>
                     </a:p>
                   </a:txBody>
@@ -31936,7 +31936,7 @@
                           <a:effectLst/>
                           <a:latin typeface="Noto Sans" panose="020B0502040504020204" pitchFamily="34" charset="0"/>
                         </a:rPr>
-                        <a:t>7,847</a:t>
+                        <a:t>7,859</a:t>
                       </a:r>
                     </a:p>
                   </a:txBody>
@@ -32173,7 +32173,7 @@
                           <a:effectLst/>
                           <a:latin typeface="Noto Sans" panose="020B0502040504020204" pitchFamily="34" charset="0"/>
                         </a:rPr>
-                        <a:t>27.1</a:t>
+                        <a:t>27.4</a:t>
                       </a:r>
                     </a:p>
                   </a:txBody>
@@ -32222,7 +32222,7 @@
                           <a:effectLst/>
                           <a:latin typeface="Noto Sans" panose="020B0502040504020204" pitchFamily="34" charset="0"/>
                         </a:rPr>
-                        <a:t>26.7</a:t>
+                        <a:t>27.0</a:t>
                       </a:r>
                     </a:p>
                   </a:txBody>
@@ -32268,7 +32268,7 @@
                           <a:effectLst/>
                           <a:latin typeface="Noto Sans" panose="020B0502040504020204" pitchFamily="34" charset="0"/>
                         </a:rPr>
-                        <a:t>25.9</a:t>
+                        <a:t>25.7</a:t>
                       </a:r>
                     </a:p>
                   </a:txBody>
@@ -32505,7 +32505,7 @@
                           <a:effectLst/>
                           <a:latin typeface="Noto Sans" panose="020B0502040504020204" pitchFamily="34" charset="0"/>
                         </a:rPr>
-                        <a:t>15.7</a:t>
+                        <a:t>15.2</a:t>
                       </a:r>
                     </a:p>
                   </a:txBody>
@@ -32554,7 +32554,7 @@
                           <a:effectLst/>
                           <a:latin typeface="Noto Sans" panose="020B0502040504020204" pitchFamily="34" charset="0"/>
                         </a:rPr>
-                        <a:t>13.3</a:t>
+                        <a:t>13.1</a:t>
                       </a:r>
                     </a:p>
                   </a:txBody>
@@ -33185,7 +33185,7 @@
                           <a:effectLst/>
                           <a:latin typeface="Noto Sans" panose="020B0502040504020204" pitchFamily="34" charset="0"/>
                         </a:rPr>
-                        <a:t>91,667</a:t>
+                        <a:t>91,894</a:t>
                       </a:r>
                     </a:p>
                   </a:txBody>
@@ -33238,7 +33238,7 @@
                           <a:effectLst/>
                           <a:latin typeface="Noto Sans" panose="020B0502040504020204" pitchFamily="34" charset="0"/>
                         </a:rPr>
-                        <a:t>102,379</a:t>
+                        <a:t>102,871</a:t>
                       </a:r>
                     </a:p>
                   </a:txBody>
@@ -33288,7 +33288,7 @@
                           <a:effectLst/>
                           <a:latin typeface="Noto Sans" panose="020B0502040504020204" pitchFamily="34" charset="0"/>
                         </a:rPr>
-                        <a:t>114,767</a:t>
+                        <a:t>115,272</a:t>
                       </a:r>
                     </a:p>
                   </a:txBody>
@@ -33551,7 +33551,7 @@
                           <a:effectLst/>
                           <a:latin typeface="Noto Sans" panose="020B0502040504020204" pitchFamily="34" charset="0"/>
                         </a:rPr>
-                        <a:t>49,927</a:t>
+                        <a:t>50,111</a:t>
                       </a:r>
                     </a:p>
                   </a:txBody>
@@ -33604,7 +33604,7 @@
                           <a:effectLst/>
                           <a:latin typeface="Noto Sans" panose="020B0502040504020204" pitchFamily="34" charset="0"/>
                         </a:rPr>
-                        <a:t>57,775</a:t>
+                        <a:t>58,225</a:t>
                       </a:r>
                     </a:p>
                   </a:txBody>
@@ -33654,7 +33654,7 @@
                           <a:effectLst/>
                           <a:latin typeface="Noto Sans" panose="020B0502040504020204" pitchFamily="34" charset="0"/>
                         </a:rPr>
-                        <a:t>67,380</a:t>
+                        <a:t>67,850</a:t>
                       </a:r>
                     </a:p>
                   </a:txBody>
@@ -33911,7 +33911,7 @@
                           <a:effectLst/>
                           <a:latin typeface="Noto Sans" panose="020B0502040504020204" pitchFamily="34" charset="0"/>
                         </a:rPr>
-                        <a:t>24,978</a:t>
+                        <a:t>25,082</a:t>
                       </a:r>
                     </a:p>
                   </a:txBody>
@@ -33964,7 +33964,7 @@
                           <a:effectLst/>
                           <a:latin typeface="Noto Sans" panose="020B0502040504020204" pitchFamily="34" charset="0"/>
                         </a:rPr>
-                        <a:t>29,464</a:t>
+                        <a:t>29,728</a:t>
                       </a:r>
                     </a:p>
                   </a:txBody>
@@ -34014,7 +34014,7 @@
                           <a:effectLst/>
                           <a:latin typeface="Noto Sans" panose="020B0502040504020204" pitchFamily="34" charset="0"/>
                         </a:rPr>
-                        <a:t>34,963</a:t>
+                        <a:t>35,245</a:t>
                       </a:r>
                     </a:p>
                   </a:txBody>
@@ -35487,7 +35487,7 @@
                           <a:ea typeface="Noto Sans" panose="020B0502040504020204" pitchFamily="34" charset="0"/>
                           <a:cs typeface="Noto Sans" panose="020B0502040504020204" pitchFamily="34" charset="0"/>
                         </a:rPr>
-                        <a:t>10,555</a:t>
+                        <a:t>10,898</a:t>
                       </a:r>
                     </a:p>
                   </a:txBody>
@@ -35844,7 +35844,7 @@
                           <a:ea typeface="Noto Sans" panose="020B0502040504020204" pitchFamily="34" charset="0"/>
                           <a:cs typeface="Noto Sans" panose="020B0502040504020204" pitchFamily="34" charset="0"/>
                         </a:rPr>
-                        <a:t>14.9</a:t>
+                        <a:t>18.7</a:t>
                       </a:r>
                     </a:p>
                   </a:txBody>
@@ -35928,7 +35928,7 @@
                           <a:ea typeface="Noto Sans" panose="020B0502040504020204" pitchFamily="34" charset="0"/>
                           <a:cs typeface="Noto Sans" panose="020B0502040504020204" pitchFamily="34" charset="0"/>
                         </a:rPr>
-                        <a:t>15.7</a:t>
+                        <a:t>15.2</a:t>
                       </a:r>
                     </a:p>
                   </a:txBody>
@@ -38046,7 +38046,7 @@
                 <a:ea typeface="Noto Sans" panose="020B0502040504020204" pitchFamily="34" charset="0"/>
                 <a:cs typeface="Noto Sans" panose="020B0502040504020204" pitchFamily="34" charset="0"/>
               </a:rPr>
-              <a:t>Từ FY26, FPT Telecom được hạch toán theo phương pháp vốn chủ sở hữu (số liệu 2025 được điều chỉnh lại để so sánh). Doanh thu báo cáo do đó giảm về 57,195 tỷ đồng cho FY26F, trong khi lợi nhuận từ công ty liên kết (~2.9 nghìn tỷ FY26F) ghi nhận qua dòng liên doanh liên kết — giúp biên LN ròng tăng lên ~19% và giảm lợi ích cổ đông thiểu số, nhờ đó EPS tăng nhanh hơn LNST-CĐTS (FY26F: +14.9% so với +11.5%).</a:t>
+              <a:t>Từ FY26, FPT Telecom được hạch toán theo phương pháp vốn chủ sở hữu (số liệu 2025 được điều chỉnh lại để so sánh). Doanh thu báo cáo do đó giảm về 57,195 tỷ đồng cho FY26F, trong khi lợi nhuận từ công ty liên kết (~2.9 nghìn tỷ FY26F) ghi nhận qua dòng liên doanh liên kết — giúp biên LN ròng tăng lên ~19% và giảm lợi ích cổ đông thiểu số, nhờ đó EPS tăng nhanh hơn LNST-CĐTS (FY26F: +18.7% so với +15.2%).</a:t>
             </a:r>
           </a:p>
           <a:p>
@@ -38083,7 +38083,7 @@
                 <a:ea typeface="Noto Sans" panose="020B0502040504020204" pitchFamily="34" charset="0"/>
                 <a:cs typeface="Noto Sans" panose="020B0502040504020204" pitchFamily="34" charset="0"/>
               </a:rPr>
-              <a:t>Chúng tôi dự phóng LNST-CĐTS FY26F đạt 10,555 tỷ đồng (+11.5% CK) và FY27F đạt 12,447 tỷ đồng (+17.9% CK), dẫn dắt bởi đà tăng tốc trở lại của CNTT nước ngoài (FY27F: +16.7%). Giá mục tiêu theo DCF (FCFF) là 91,570 đồng/cp; tại thị giá đáy 2 năm 62,900 đồng (24/07/26), FPT giao dịch ở mức 10.8x P/E 2026F so với trung vị 5 năm trên 18x, tương ứng lợi nhuận kỳ vọng 46% (MUA). Rủi ro: chi tiêu CNTT tại Mỹ/toàn cầu suy yếu, trì hoãn hợp đồng do thuế quan, biến động tỷ giá JPY/USD.</a:t>
+              <a:t>Chúng tôi dự phóng LNST-CĐTS FY26F đạt 10,898 tỷ đồng (+15.2% CK) và FY27F đạt 12,642 tỷ đồng (+16.0% CK), dẫn dắt bởi đà tăng tốc trở lại của CNTT nước ngoài (FY27F: +16.7%). Giá mục tiêu theo DCF (FCFF) là 91,570 đồng/cp; tại thị giá đáy 2 năm 62,900 đồng (24/07/26), FPT giao dịch ở mức 10.4x P/E 2026F so với trung vị 5 năm trên 18x, tương ứng lợi nhuận kỳ vọng 46% (MUA). Rủi ro: chi tiêu CNTT tại Mỹ/toàn cầu suy yếu, trì hoãn hợp đồng do thuế quan, biến động tỷ giá JPY/USD.</a:t>
             </a:r>
             <a:endParaRPr kumimoji="1" lang="en-US" altLang="ko-KR" sz="800" b="0" dirty="0">
               <a:solidFill>
@@ -39142,7 +39142,7 @@
                           <a:effectLst/>
                           <a:latin typeface="Noto Sans" panose="020B0502040504020204" pitchFamily="34" charset="0"/>
                         </a:rPr>
-                        <a:t>9,257</a:t>
+                        <a:t>9,757</a:t>
                       </a:r>
                     </a:p>
                   </a:txBody>
@@ -39188,7 +39188,7 @@
                           <a:effectLst/>
                           <a:latin typeface="Noto Sans" panose="020B0502040504020204" pitchFamily="34" charset="0"/>
                         </a:rPr>
-                        <a:t>10,601</a:t>
+                        <a:t>10,802</a:t>
                       </a:r>
                     </a:p>
                   </a:txBody>
@@ -39468,7 +39468,7 @@
                           <a:effectLst/>
                           <a:latin typeface="Noto Sans" panose="020B0502040504020204" pitchFamily="34" charset="0"/>
                         </a:rPr>
-                        <a:t>12,770</a:t>
+                        <a:t>13,016</a:t>
                       </a:r>
                     </a:p>
                   </a:txBody>
@@ -39517,7 +39517,7 @@
                           <a:effectLst/>
                           <a:latin typeface="Noto Sans" panose="020B0502040504020204" pitchFamily="34" charset="0"/>
                         </a:rPr>
-                        <a:t>14,796</a:t>
+                        <a:t>15,121</a:t>
                       </a:r>
                     </a:p>
                   </a:txBody>
@@ -39563,7 +39563,7 @@
                           <a:effectLst/>
                           <a:latin typeface="Noto Sans" panose="020B0502040504020204" pitchFamily="34" charset="0"/>
                         </a:rPr>
-                        <a:t>16,989</a:t>
+                        <a:t>17,015</a:t>
                       </a:r>
                     </a:p>
                   </a:txBody>
@@ -39800,7 +39800,7 @@
                           <a:effectLst/>
                           <a:latin typeface="Noto Sans" panose="020B0502040504020204" pitchFamily="34" charset="0"/>
                         </a:rPr>
-                        <a:t>10,555</a:t>
+                        <a:t>10,898</a:t>
                       </a:r>
                     </a:p>
                   </a:txBody>
@@ -39849,7 +39849,7 @@
                           <a:effectLst/>
                           <a:latin typeface="Noto Sans" panose="020B0502040504020204" pitchFamily="34" charset="0"/>
                         </a:rPr>
-                        <a:t>12,447</a:t>
+                        <a:t>12,642</a:t>
                       </a:r>
                     </a:p>
                   </a:txBody>
@@ -39895,7 +39895,7 @@
                           <a:effectLst/>
                           <a:latin typeface="Noto Sans" panose="020B0502040504020204" pitchFamily="34" charset="0"/>
                         </a:rPr>
-                        <a:t>14,204</a:t>
+                        <a:t>14,225</a:t>
                       </a:r>
                     </a:p>
                   </a:txBody>
@@ -40132,7 +40132,7 @@
                           <a:effectLst/>
                           <a:latin typeface="Noto Sans" panose="020B0502040504020204" pitchFamily="34" charset="0"/>
                         </a:rPr>
-                        <a:t>5,831</a:t>
+                        <a:t>6,021</a:t>
                       </a:r>
                     </a:p>
                   </a:txBody>
@@ -40181,7 +40181,7 @@
                           <a:effectLst/>
                           <a:latin typeface="Noto Sans" panose="020B0502040504020204" pitchFamily="34" charset="0"/>
                         </a:rPr>
-                        <a:t>6,877</a:t>
+                        <a:t>6,984</a:t>
                       </a:r>
                     </a:p>
                   </a:txBody>
@@ -40227,7 +40227,7 @@
                           <a:effectLst/>
                           <a:latin typeface="Noto Sans" panose="020B0502040504020204" pitchFamily="34" charset="0"/>
                         </a:rPr>
-                        <a:t>7,847</a:t>
+                        <a:t>7,859</a:t>
                       </a:r>
                     </a:p>
                   </a:txBody>
@@ -40464,7 +40464,7 @@
                           <a:effectLst/>
                           <a:latin typeface="Noto Sans" panose="020B0502040504020204" pitchFamily="34" charset="0"/>
                         </a:rPr>
-                        <a:t>27.1</a:t>
+                        <a:t>27.4</a:t>
                       </a:r>
                     </a:p>
                   </a:txBody>
@@ -40513,7 +40513,7 @@
                           <a:effectLst/>
                           <a:latin typeface="Noto Sans" panose="020B0502040504020204" pitchFamily="34" charset="0"/>
                         </a:rPr>
-                        <a:t>26.7</a:t>
+                        <a:t>27.0</a:t>
                       </a:r>
                     </a:p>
                   </a:txBody>
@@ -40559,7 +40559,7 @@
                           <a:effectLst/>
                           <a:latin typeface="Noto Sans" panose="020B0502040504020204" pitchFamily="34" charset="0"/>
                         </a:rPr>
-                        <a:t>25.9</a:t>
+                        <a:t>25.7</a:t>
                       </a:r>
                     </a:p>
                   </a:txBody>
@@ -40796,7 +40796,7 @@
                           <a:effectLst/>
                           <a:latin typeface="Noto Sans" panose="020B0502040504020204" pitchFamily="34" charset="0"/>
                         </a:rPr>
-                        <a:t>15.7</a:t>
+                        <a:t>15.2</a:t>
                       </a:r>
                     </a:p>
                   </a:txBody>
@@ -40845,7 +40845,7 @@
                           <a:effectLst/>
                           <a:latin typeface="Noto Sans" panose="020B0502040504020204" pitchFamily="34" charset="0"/>
                         </a:rPr>
-                        <a:t>13.3</a:t>
+                        <a:t>13.1</a:t>
                       </a:r>
                     </a:p>
                   </a:txBody>
@@ -41485,7 +41485,7 @@
                           <a:effectLst/>
                           <a:latin typeface="Noto Sans" panose="020B0502040504020204" pitchFamily="34" charset="0"/>
                         </a:rPr>
-                        <a:t>91,667</a:t>
+                        <a:t>91,894</a:t>
                       </a:r>
                     </a:p>
                   </a:txBody>
@@ -41538,7 +41538,7 @@
                           <a:effectLst/>
                           <a:latin typeface="Noto Sans" panose="020B0502040504020204" pitchFamily="34" charset="0"/>
                         </a:rPr>
-                        <a:t>102,379</a:t>
+                        <a:t>102,871</a:t>
                       </a:r>
                     </a:p>
                   </a:txBody>
@@ -41588,7 +41588,7 @@
                           <a:effectLst/>
                           <a:latin typeface="Noto Sans" panose="020B0502040504020204" pitchFamily="34" charset="0"/>
                         </a:rPr>
-                        <a:t>114,767</a:t>
+                        <a:t>115,272</a:t>
                       </a:r>
                     </a:p>
                   </a:txBody>
@@ -41854,7 +41854,7 @@
                           <a:effectLst/>
                           <a:latin typeface="Noto Sans" panose="020B0502040504020204" pitchFamily="34" charset="0"/>
                         </a:rPr>
-                        <a:t>49,927</a:t>
+                        <a:t>50,111</a:t>
                       </a:r>
                     </a:p>
                   </a:txBody>
@@ -41907,7 +41907,7 @@
                           <a:effectLst/>
                           <a:latin typeface="Noto Sans" panose="020B0502040504020204" pitchFamily="34" charset="0"/>
                         </a:rPr>
-                        <a:t>57,775</a:t>
+                        <a:t>58,225</a:t>
                       </a:r>
                     </a:p>
                   </a:txBody>
@@ -41957,7 +41957,7 @@
                           <a:effectLst/>
                           <a:latin typeface="Noto Sans" panose="020B0502040504020204" pitchFamily="34" charset="0"/>
                         </a:rPr>
-                        <a:t>67,380</a:t>
+                        <a:t>67,850</a:t>
                       </a:r>
                     </a:p>
                   </a:txBody>
@@ -42214,7 +42214,7 @@
                           <a:effectLst/>
                           <a:latin typeface="Noto Sans" panose="020B0502040504020204" pitchFamily="34" charset="0"/>
                         </a:rPr>
-                        <a:t>24,978</a:t>
+                        <a:t>25,082</a:t>
                       </a:r>
                     </a:p>
                   </a:txBody>
@@ -42267,7 +42267,7 @@
                           <a:effectLst/>
                           <a:latin typeface="Noto Sans" panose="020B0502040504020204" pitchFamily="34" charset="0"/>
                         </a:rPr>
-                        <a:t>29,464</a:t>
+                        <a:t>29,728</a:t>
                       </a:r>
                     </a:p>
                   </a:txBody>
@@ -42317,7 +42317,7 @@
                           <a:effectLst/>
                           <a:latin typeface="Noto Sans" panose="020B0502040504020204" pitchFamily="34" charset="0"/>
                         </a:rPr>
-                        <a:t>34,963</a:t>
+                        <a:t>35,245</a:t>
                       </a:r>
                     </a:p>
                   </a:txBody>

--- a/MASVN_RS_WM_2H26_outlook_Equity_VN_2026_STBFPT_24July2026.pptx
+++ b/MASVN_RS_WM_2H26_outlook_Equity_VN_2026_STBFPT_24July2026.pptx
@@ -28155,7 +28155,7 @@
                           <a:ea typeface="Noto Sans" panose="020B0502040504020204" pitchFamily="34" charset="0"/>
                           <a:cs typeface="Noto Sans" panose="020B0502040504020204" pitchFamily="34" charset="0"/>
                         </a:rPr>
-                        <a:t>10,898</a:t>
+                        <a:t>10,884</a:t>
                       </a:r>
                     </a:p>
                   </a:txBody>
@@ -28320,7 +28320,7 @@
                           <a:ea typeface="Noto Sans" panose="020B0502040504020204" pitchFamily="34" charset="0"/>
                           <a:cs typeface="Noto Sans" panose="020B0502040504020204" pitchFamily="34" charset="0"/>
                         </a:rPr>
-                        <a:t>18.7</a:t>
+                        <a:t>18.5</a:t>
                       </a:r>
                     </a:p>
                   </a:txBody>
@@ -29726,7 +29726,7 @@
                 <a:ea typeface="Noto Sans" panose="020B0502040504020204" pitchFamily="34" charset="0"/>
                 <a:cs typeface="Noto Sans" panose="020B0502040504020204" pitchFamily="34" charset="0"/>
               </a:rPr>
-              <a:t>From FY26, FPT Telecom is accounted for under the equity method (2025 restated for comparison). Reported revenue therefore steps down (FY26F: VND 57,195bn) while associate income (~VND 2.9tn in FY26F) flows through the equity-method line — lifting net margin to ~19% and reducing minority leakage, so EPS grows faster than NPATMI (FY26F: +18.7% vs +15.2%).</a:t>
+              <a:t>From FY26, FPT Telecom is accounted for under the equity method (2025 restated for comparison). Reported revenue therefore steps down (FY26F: VND 57,195bn) while associate income (~VND 2.9tn in FY26F) flows through the equity-method line — lifting net margin to ~19% and reducing minority leakage, so EPS grows faster than NPATMI (FY26F: +18.5% vs +15.0%).</a:t>
             </a:r>
             <a:endParaRPr kumimoji="1" lang="en-US" altLang="ko-KR" sz="800" b="1" dirty="0">
               <a:solidFill>
@@ -29771,7 +29771,7 @@
                 <a:ea typeface="Noto Sans" panose="020B0502040504020204" pitchFamily="34" charset="0"/>
                 <a:cs typeface="Noto Sans" panose="020B0502040504020204" pitchFamily="34" charset="0"/>
               </a:rPr>
-              <a:t>We forecast FY26F NPATMI of VND 10,898bn (+15.2% YoY) and FY27F of VND 12,642bn (+16.0% YoY), driven by a Global IT growth reacceleration (FY27F: +16.7%). Our DCF (FCFF)-based target price is VND 91,570; at the current two-year-low price of VND 62,900 (24/07/26), FPT trades at just 10.4x 2026F P/E versus a 5-year median above 18x, implying a 46% expected return (BUY). Risks: soft US/global IT spending, tariff-related deal delays, and JPY/USD FX swings.</a:t>
+              <a:t>We forecast FY26F NPATMI of VND 10,884bn (+15.0% YoY), FY27F VND 12,625bn (+16.0% YoY) and FY28F VND 14,582bn (+15.5% YoY), driven by a Global IT growth reacceleration (FY27F: +16.7%). Our DCF (FCFF)-based target price is VND 91,570; at the current two-year-low price of VND 62,900 (24/07/26), FPT trades at just 10.5x 2026F P/E versus a 5-year median above 18x, implying a 46% expected return (BUY). Risks: soft US/global IT spending, tariff-related deal delays, and JPY/USD FX swings.</a:t>
             </a:r>
           </a:p>
           <a:p>
@@ -30519,7 +30519,7 @@
                           <a:effectLst/>
                           <a:latin typeface="Noto Sans" panose="020B0502040504020204" pitchFamily="34" charset="0"/>
                         </a:rPr>
-                        <a:t>57,195</a:t>
+                        <a:t>57,165</a:t>
                       </a:r>
                     </a:p>
                   </a:txBody>
@@ -30572,7 +30572,7 @@
                           <a:effectLst/>
                           <a:latin typeface="Noto Sans" panose="020B0502040504020204" pitchFamily="34" charset="0"/>
                         </a:rPr>
-                        <a:t>65,945</a:t>
+                        <a:t>65,914</a:t>
                       </a:r>
                     </a:p>
                   </a:txBody>
@@ -30622,7 +30622,7 @@
                           <a:effectLst/>
                           <a:latin typeface="Noto Sans" panose="020B0502040504020204" pitchFamily="34" charset="0"/>
                         </a:rPr>
-                        <a:t>76,537</a:t>
+                        <a:t>76,504</a:t>
                       </a:r>
                     </a:p>
                   </a:txBody>
@@ -30851,7 +30851,7 @@
                           <a:effectLst/>
                           <a:latin typeface="Noto Sans" panose="020B0502040504020204" pitchFamily="34" charset="0"/>
                         </a:rPr>
-                        <a:t>9,757</a:t>
+                        <a:t>9,741</a:t>
                       </a:r>
                     </a:p>
                   </a:txBody>
@@ -30897,7 +30897,7 @@
                           <a:effectLst/>
                           <a:latin typeface="Noto Sans" panose="020B0502040504020204" pitchFamily="34" charset="0"/>
                         </a:rPr>
-                        <a:t>10,802</a:t>
+                        <a:t>10,785</a:t>
                       </a:r>
                     </a:p>
                   </a:txBody>
@@ -30940,7 +30940,7 @@
                           <a:effectLst/>
                           <a:latin typeface="Noto Sans" panose="020B0502040504020204" pitchFamily="34" charset="0"/>
                         </a:rPr>
-                        <a:t>12,260</a:t>
+                        <a:t>12,242</a:t>
                       </a:r>
                     </a:p>
                   </a:txBody>
@@ -31177,7 +31177,7 @@
                           <a:effectLst/>
                           <a:latin typeface="Noto Sans" panose="020B0502040504020204" pitchFamily="34" charset="0"/>
                         </a:rPr>
-                        <a:t>13,016</a:t>
+                        <a:t>12,998</a:t>
                       </a:r>
                     </a:p>
                   </a:txBody>
@@ -31226,7 +31226,7 @@
                           <a:effectLst/>
                           <a:latin typeface="Noto Sans" panose="020B0502040504020204" pitchFamily="34" charset="0"/>
                         </a:rPr>
-                        <a:t>15,121</a:t>
+                        <a:t>15,101</a:t>
                       </a:r>
                     </a:p>
                   </a:txBody>
@@ -31272,7 +31272,7 @@
                           <a:effectLst/>
                           <a:latin typeface="Noto Sans" panose="020B0502040504020204" pitchFamily="34" charset="0"/>
                         </a:rPr>
-                        <a:t>17,015</a:t>
+                        <a:t>17,441</a:t>
                       </a:r>
                     </a:p>
                   </a:txBody>
@@ -31509,7 +31509,7 @@
                           <a:effectLst/>
                           <a:latin typeface="Noto Sans" panose="020B0502040504020204" pitchFamily="34" charset="0"/>
                         </a:rPr>
-                        <a:t>10,898</a:t>
+                        <a:t>10,884</a:t>
                       </a:r>
                     </a:p>
                   </a:txBody>
@@ -31558,7 +31558,7 @@
                           <a:effectLst/>
                           <a:latin typeface="Noto Sans" panose="020B0502040504020204" pitchFamily="34" charset="0"/>
                         </a:rPr>
-                        <a:t>12,642</a:t>
+                        <a:t>12,625</a:t>
                       </a:r>
                     </a:p>
                   </a:txBody>
@@ -31604,7 +31604,7 @@
                           <a:effectLst/>
                           <a:latin typeface="Noto Sans" panose="020B0502040504020204" pitchFamily="34" charset="0"/>
                         </a:rPr>
-                        <a:t>14,225</a:t>
+                        <a:t>14,582</a:t>
                       </a:r>
                     </a:p>
                   </a:txBody>
@@ -31841,7 +31841,7 @@
                           <a:effectLst/>
                           <a:latin typeface="Noto Sans" panose="020B0502040504020204" pitchFamily="34" charset="0"/>
                         </a:rPr>
-                        <a:t>6,021</a:t>
+                        <a:t>6,013</a:t>
                       </a:r>
                     </a:p>
                   </a:txBody>
@@ -31890,7 +31890,7 @@
                           <a:effectLst/>
                           <a:latin typeface="Noto Sans" panose="020B0502040504020204" pitchFamily="34" charset="0"/>
                         </a:rPr>
-                        <a:t>6,984</a:t>
+                        <a:t>6,975</a:t>
                       </a:r>
                     </a:p>
                   </a:txBody>
@@ -31936,7 +31936,7 @@
                           <a:effectLst/>
                           <a:latin typeface="Noto Sans" panose="020B0502040504020204" pitchFamily="34" charset="0"/>
                         </a:rPr>
-                        <a:t>7,859</a:t>
+                        <a:t>8,056</a:t>
                       </a:r>
                     </a:p>
                   </a:txBody>
@@ -32268,7 +32268,7 @@
                           <a:effectLst/>
                           <a:latin typeface="Noto Sans" panose="020B0502040504020204" pitchFamily="34" charset="0"/>
                         </a:rPr>
-                        <a:t>25.7</a:t>
+                        <a:t>26.3</a:t>
                       </a:r>
                     </a:p>
                   </a:txBody>
@@ -32600,7 +32600,7 @@
                           <a:effectLst/>
                           <a:latin typeface="Noto Sans" panose="020B0502040504020204" pitchFamily="34" charset="0"/>
                         </a:rPr>
-                        <a:t>11.7</a:t>
+                        <a:t>11.4</a:t>
                       </a:r>
                     </a:p>
                   </a:txBody>
@@ -33185,7 +33185,7 @@
                           <a:effectLst/>
                           <a:latin typeface="Noto Sans" panose="020B0502040504020204" pitchFamily="34" charset="0"/>
                         </a:rPr>
-                        <a:t>91,894</a:t>
+                        <a:t>91,879</a:t>
                       </a:r>
                     </a:p>
                   </a:txBody>
@@ -33238,7 +33238,7 @@
                           <a:effectLst/>
                           <a:latin typeface="Noto Sans" panose="020B0502040504020204" pitchFamily="34" charset="0"/>
                         </a:rPr>
-                        <a:t>102,871</a:t>
+                        <a:t>102,839</a:t>
                       </a:r>
                     </a:p>
                   </a:txBody>
@@ -33288,7 +33288,7 @@
                           <a:effectLst/>
                           <a:latin typeface="Noto Sans" panose="020B0502040504020204" pitchFamily="34" charset="0"/>
                         </a:rPr>
-                        <a:t>115,272</a:t>
+                        <a:t>115,602</a:t>
                       </a:r>
                     </a:p>
                   </a:txBody>
@@ -33551,7 +33551,7 @@
                           <a:effectLst/>
                           <a:latin typeface="Noto Sans" panose="020B0502040504020204" pitchFamily="34" charset="0"/>
                         </a:rPr>
-                        <a:t>50,111</a:t>
+                        <a:t>50,096</a:t>
                       </a:r>
                     </a:p>
                   </a:txBody>
@@ -33604,7 +33604,7 @@
                           <a:effectLst/>
                           <a:latin typeface="Noto Sans" panose="020B0502040504020204" pitchFamily="34" charset="0"/>
                         </a:rPr>
-                        <a:t>58,225</a:t>
+                        <a:t>58,193</a:t>
                       </a:r>
                     </a:p>
                   </a:txBody>
@@ -33654,7 +33654,7 @@
                           <a:effectLst/>
                           <a:latin typeface="Noto Sans" panose="020B0502040504020204" pitchFamily="34" charset="0"/>
                         </a:rPr>
-                        <a:t>67,850</a:t>
+                        <a:t>68,181</a:t>
                       </a:r>
                     </a:p>
                   </a:txBody>
@@ -33911,7 +33911,7 @@
                           <a:effectLst/>
                           <a:latin typeface="Noto Sans" panose="020B0502040504020204" pitchFamily="34" charset="0"/>
                         </a:rPr>
-                        <a:t>25,082</a:t>
+                        <a:t>25,074</a:t>
                       </a:r>
                     </a:p>
                   </a:txBody>
@@ -33964,7 +33964,7 @@
                           <a:effectLst/>
                           <a:latin typeface="Noto Sans" panose="020B0502040504020204" pitchFamily="34" charset="0"/>
                         </a:rPr>
-                        <a:t>29,728</a:t>
+                        <a:t>29,709</a:t>
                       </a:r>
                     </a:p>
                   </a:txBody>
@@ -34014,7 +34014,7 @@
                           <a:effectLst/>
                           <a:latin typeface="Noto Sans" panose="020B0502040504020204" pitchFamily="34" charset="0"/>
                         </a:rPr>
-                        <a:t>35,245</a:t>
+                        <a:t>35,440</a:t>
                       </a:r>
                     </a:p>
                   </a:txBody>
@@ -35487,7 +35487,7 @@
                           <a:ea typeface="Noto Sans" panose="020B0502040504020204" pitchFamily="34" charset="0"/>
                           <a:cs typeface="Noto Sans" panose="020B0502040504020204" pitchFamily="34" charset="0"/>
                         </a:rPr>
-                        <a:t>10,898</a:t>
+                        <a:t>10,884</a:t>
                       </a:r>
                     </a:p>
                   </a:txBody>
@@ -35844,7 +35844,7 @@
                           <a:ea typeface="Noto Sans" panose="020B0502040504020204" pitchFamily="34" charset="0"/>
                           <a:cs typeface="Noto Sans" panose="020B0502040504020204" pitchFamily="34" charset="0"/>
                         </a:rPr>
-                        <a:t>18.7</a:t>
+                        <a:t>18.5</a:t>
                       </a:r>
                     </a:p>
                   </a:txBody>
@@ -38046,7 +38046,7 @@
                 <a:ea typeface="Noto Sans" panose="020B0502040504020204" pitchFamily="34" charset="0"/>
                 <a:cs typeface="Noto Sans" panose="020B0502040504020204" pitchFamily="34" charset="0"/>
               </a:rPr>
-              <a:t>Từ FY26, FPT Telecom được hạch toán theo phương pháp vốn chủ sở hữu (số liệu 2025 được điều chỉnh lại để so sánh). Doanh thu báo cáo do đó giảm về 57,195 tỷ đồng cho FY26F, trong khi lợi nhuận từ công ty liên kết (~2.9 nghìn tỷ FY26F) ghi nhận qua dòng liên doanh liên kết — giúp biên LN ròng tăng lên ~19% và giảm lợi ích cổ đông thiểu số, nhờ đó EPS tăng nhanh hơn LNST-CĐTS (FY26F: +18.7% so với +15.2%).</a:t>
+              <a:t>Từ FY26, FPT Telecom được hạch toán theo phương pháp vốn chủ sở hữu (số liệu 2025 được điều chỉnh lại để so sánh). Doanh thu báo cáo do đó giảm về 57,195 tỷ đồng cho FY26F, trong khi lợi nhuận từ công ty liên kết (~2.9 nghìn tỷ FY26F) ghi nhận qua dòng liên doanh liên kết — giúp biên LN ròng tăng lên ~19% và giảm lợi ích cổ đông thiểu số, nhờ đó EPS tăng nhanh hơn LNST-CĐTS (FY26F: +18.5% so với +15.0%).</a:t>
             </a:r>
           </a:p>
           <a:p>
@@ -38083,7 +38083,7 @@
                 <a:ea typeface="Noto Sans" panose="020B0502040504020204" pitchFamily="34" charset="0"/>
                 <a:cs typeface="Noto Sans" panose="020B0502040504020204" pitchFamily="34" charset="0"/>
               </a:rPr>
-              <a:t>Chúng tôi dự phóng LNST-CĐTS FY26F đạt 10,898 tỷ đồng (+15.2% CK) và FY27F đạt 12,642 tỷ đồng (+16.0% CK), dẫn dắt bởi đà tăng tốc trở lại của CNTT nước ngoài (FY27F: +16.7%). Giá mục tiêu theo DCF (FCFF) là 91,570 đồng/cp; tại thị giá đáy 2 năm 62,900 đồng (24/07/26), FPT giao dịch ở mức 10.4x P/E 2026F so với trung vị 5 năm trên 18x, tương ứng lợi nhuận kỳ vọng 46% (MUA). Rủi ro: chi tiêu CNTT tại Mỹ/toàn cầu suy yếu, trì hoãn hợp đồng do thuế quan, biến động tỷ giá JPY/USD.</a:t>
+              <a:t>Chúng tôi dự phóng LNST-CĐTS FY26F đạt 10,884 tỷ đồng (+15.0% CK), FY27F đạt 12,625 tỷ đồng (+16.0% CK) và FY28F đạt 14,582 tỷ đồng (+15.5% CK), dẫn dắt bởi đà tăng tốc trở lại của CNTT nước ngoài (FY27F: +16.7%). Giá mục tiêu theo DCF (FCFF) là 91,570 đồng/cp; tại thị giá đáy 2 năm 62,900 đồng (24/07/26), FPT giao dịch ở mức 10.5x P/E 2026F so với trung vị 5 năm trên 18x, tương ứng lợi nhuận kỳ vọng 46% (MUA). Rủi ro: chi tiêu CNTT tại Mỹ/toàn cầu suy yếu, trì hoãn hợp đồng do thuế quan, biến động tỷ giá JPY/USD.</a:t>
             </a:r>
             <a:endParaRPr kumimoji="1" lang="en-US" altLang="ko-KR" sz="800" b="0" dirty="0">
               <a:solidFill>
@@ -38810,7 +38810,7 @@
                           <a:effectLst/>
                           <a:latin typeface="Noto Sans" panose="020B0502040504020204" pitchFamily="34" charset="0"/>
                         </a:rPr>
-                        <a:t>57,195</a:t>
+                        <a:t>57,165</a:t>
                       </a:r>
                     </a:p>
                   </a:txBody>
@@ -38863,7 +38863,7 @@
                           <a:effectLst/>
                           <a:latin typeface="Noto Sans" panose="020B0502040504020204" pitchFamily="34" charset="0"/>
                         </a:rPr>
-                        <a:t>65,945</a:t>
+                        <a:t>65,914</a:t>
                       </a:r>
                     </a:p>
                   </a:txBody>
@@ -38913,7 +38913,7 @@
                           <a:effectLst/>
                           <a:latin typeface="Noto Sans" panose="020B0502040504020204" pitchFamily="34" charset="0"/>
                         </a:rPr>
-                        <a:t>76,537</a:t>
+                        <a:t>76,504</a:t>
                       </a:r>
                     </a:p>
                   </a:txBody>
@@ -39142,7 +39142,7 @@
                           <a:effectLst/>
                           <a:latin typeface="Noto Sans" panose="020B0502040504020204" pitchFamily="34" charset="0"/>
                         </a:rPr>
-                        <a:t>9,757</a:t>
+                        <a:t>9,741</a:t>
                       </a:r>
                     </a:p>
                   </a:txBody>
@@ -39188,7 +39188,7 @@
                           <a:effectLst/>
                           <a:latin typeface="Noto Sans" panose="020B0502040504020204" pitchFamily="34" charset="0"/>
                         </a:rPr>
-                        <a:t>10,802</a:t>
+                        <a:t>10,785</a:t>
                       </a:r>
                     </a:p>
                   </a:txBody>
@@ -39231,7 +39231,7 @@
                           <a:effectLst/>
                           <a:latin typeface="Noto Sans" panose="020B0502040504020204" pitchFamily="34" charset="0"/>
                         </a:rPr>
-                        <a:t>12,260</a:t>
+                        <a:t>12,242</a:t>
                       </a:r>
                     </a:p>
                   </a:txBody>
@@ -39468,7 +39468,7 @@
                           <a:effectLst/>
                           <a:latin typeface="Noto Sans" panose="020B0502040504020204" pitchFamily="34" charset="0"/>
                         </a:rPr>
-                        <a:t>13,016</a:t>
+                        <a:t>12,998</a:t>
                       </a:r>
                     </a:p>
                   </a:txBody>
@@ -39517,7 +39517,7 @@
                           <a:effectLst/>
                           <a:latin typeface="Noto Sans" panose="020B0502040504020204" pitchFamily="34" charset="0"/>
                         </a:rPr>
-                        <a:t>15,121</a:t>
+                        <a:t>15,101</a:t>
                       </a:r>
                     </a:p>
                   </a:txBody>
@@ -39563,7 +39563,7 @@
                           <a:effectLst/>
                           <a:latin typeface="Noto Sans" panose="020B0502040504020204" pitchFamily="34" charset="0"/>
                         </a:rPr>
-                        <a:t>17,015</a:t>
+                        <a:t>17,441</a:t>
                       </a:r>
                     </a:p>
                   </a:txBody>
@@ -39800,7 +39800,7 @@
                           <a:effectLst/>
                           <a:latin typeface="Noto Sans" panose="020B0502040504020204" pitchFamily="34" charset="0"/>
                         </a:rPr>
-                        <a:t>10,898</a:t>
+                        <a:t>10,884</a:t>
                       </a:r>
                     </a:p>
                   </a:txBody>
@@ -39849,7 +39849,7 @@
                           <a:effectLst/>
                           <a:latin typeface="Noto Sans" panose="020B0502040504020204" pitchFamily="34" charset="0"/>
                         </a:rPr>
-                        <a:t>12,642</a:t>
+                        <a:t>12,625</a:t>
                       </a:r>
                     </a:p>
                   </a:txBody>
@@ -39895,7 +39895,7 @@
                           <a:effectLst/>
                           <a:latin typeface="Noto Sans" panose="020B0502040504020204" pitchFamily="34" charset="0"/>
                         </a:rPr>
-                        <a:t>14,225</a:t>
+                        <a:t>14,582</a:t>
                       </a:r>
                     </a:p>
                   </a:txBody>
@@ -40132,7 +40132,7 @@
                           <a:effectLst/>
                           <a:latin typeface="Noto Sans" panose="020B0502040504020204" pitchFamily="34" charset="0"/>
                         </a:rPr>
-                        <a:t>6,021</a:t>
+                        <a:t>6,013</a:t>
                       </a:r>
                     </a:p>
                   </a:txBody>
@@ -40181,7 +40181,7 @@
                           <a:effectLst/>
                           <a:latin typeface="Noto Sans" panose="020B0502040504020204" pitchFamily="34" charset="0"/>
                         </a:rPr>
-                        <a:t>6,984</a:t>
+                        <a:t>6,975</a:t>
                       </a:r>
                     </a:p>
                   </a:txBody>
@@ -40227,7 +40227,7 @@
                           <a:effectLst/>
                           <a:latin typeface="Noto Sans" panose="020B0502040504020204" pitchFamily="34" charset="0"/>
                         </a:rPr>
-                        <a:t>7,859</a:t>
+                        <a:t>8,056</a:t>
                       </a:r>
                     </a:p>
                   </a:txBody>
@@ -40559,7 +40559,7 @@
                           <a:effectLst/>
                           <a:latin typeface="Noto Sans" panose="020B0502040504020204" pitchFamily="34" charset="0"/>
                         </a:rPr>
-                        <a:t>25.7</a:t>
+                        <a:t>26.3</a:t>
                       </a:r>
                     </a:p>
                   </a:txBody>
@@ -40891,7 +40891,7 @@
                           <a:effectLst/>
                           <a:latin typeface="Noto Sans" panose="020B0502040504020204" pitchFamily="34" charset="0"/>
                         </a:rPr>
-                        <a:t>11.7</a:t>
+                        <a:t>11.4</a:t>
                       </a:r>
                     </a:p>
                   </a:txBody>
@@ -41485,7 +41485,7 @@
                           <a:effectLst/>
                           <a:latin typeface="Noto Sans" panose="020B0502040504020204" pitchFamily="34" charset="0"/>
                         </a:rPr>
-                        <a:t>91,894</a:t>
+                        <a:t>91,879</a:t>
                       </a:r>
                     </a:p>
                   </a:txBody>
@@ -41538,7 +41538,7 @@
                           <a:effectLst/>
                           <a:latin typeface="Noto Sans" panose="020B0502040504020204" pitchFamily="34" charset="0"/>
                         </a:rPr>
-                        <a:t>102,871</a:t>
+                        <a:t>102,839</a:t>
                       </a:r>
                     </a:p>
                   </a:txBody>
@@ -41588,7 +41588,7 @@
                           <a:effectLst/>
                           <a:latin typeface="Noto Sans" panose="020B0502040504020204" pitchFamily="34" charset="0"/>
                         </a:rPr>
-                        <a:t>115,272</a:t>
+                        <a:t>115,602</a:t>
                       </a:r>
                     </a:p>
                   </a:txBody>
@@ -41854,7 +41854,7 @@
                           <a:effectLst/>
                           <a:latin typeface="Noto Sans" panose="020B0502040504020204" pitchFamily="34" charset="0"/>
                         </a:rPr>
-                        <a:t>50,111</a:t>
+                        <a:t>50,096</a:t>
                       </a:r>
                     </a:p>
                   </a:txBody>
@@ -41907,7 +41907,7 @@
                           <a:effectLst/>
                           <a:latin typeface="Noto Sans" panose="020B0502040504020204" pitchFamily="34" charset="0"/>
                         </a:rPr>
-                        <a:t>58,225</a:t>
+                        <a:t>58,193</a:t>
                       </a:r>
                     </a:p>
                   </a:txBody>
@@ -41957,7 +41957,7 @@
                           <a:effectLst/>
                           <a:latin typeface="Noto Sans" panose="020B0502040504020204" pitchFamily="34" charset="0"/>
                         </a:rPr>
-                        <a:t>67,850</a:t>
+                        <a:t>68,181</a:t>
                       </a:r>
                     </a:p>
                   </a:txBody>
@@ -42214,7 +42214,7 @@
                           <a:effectLst/>
                           <a:latin typeface="Noto Sans" panose="020B0502040504020204" pitchFamily="34" charset="0"/>
                         </a:rPr>
-                        <a:t>25,082</a:t>
+                        <a:t>25,074</a:t>
                       </a:r>
                     </a:p>
                   </a:txBody>
@@ -42267,7 +42267,7 @@
                           <a:effectLst/>
                           <a:latin typeface="Noto Sans" panose="020B0502040504020204" pitchFamily="34" charset="0"/>
                         </a:rPr>
-                        <a:t>29,728</a:t>
+                        <a:t>29,709</a:t>
                       </a:r>
                     </a:p>
                   </a:txBody>
@@ -42317,7 +42317,7 @@
                           <a:effectLst/>
                           <a:latin typeface="Noto Sans" panose="020B0502040504020204" pitchFamily="34" charset="0"/>
                         </a:rPr>
-                        <a:t>35,245</a:t>
+                        <a:t>35,440</a:t>
                       </a:r>
                     </a:p>
                   </a:txBody>

--- a/MASVN_RS_WM_2H26_outlook_Equity_VN_2026_STBFPT_24July2026.pptx
+++ b/MASVN_RS_WM_2H26_outlook_Equity_VN_2026_STBFPT_24July2026.pptx
@@ -29771,7 +29771,7 @@
                 <a:ea typeface="Noto Sans" panose="020B0502040504020204" pitchFamily="34" charset="0"/>
                 <a:cs typeface="Noto Sans" panose="020B0502040504020204" pitchFamily="34" charset="0"/>
               </a:rPr>
-              <a:t>We forecast FY26F NPATMI of VND 10,884bn (+15.0% YoY), FY27F VND 12,625bn (+16.0% YoY) and FY28F VND 14,582bn (+15.5% YoY), driven by a Global IT growth reacceleration (FY27F: +16.7%). Our DCF (FCFF)-based target price is VND 91,570; at the current two-year-low price of VND 62,900 (24/07/26), FPT trades at just 10.5x 2026F P/E versus a 5-year median above 18x, implying a 46% expected return (BUY). Risks: soft US/global IT spending, tariff-related deal delays, and JPY/USD FX swings.</a:t>
+              <a:t>We forecast FY26F NPATMI of VND 10,884bn (+15.0% YoY), FY27F VND 12,571bn (+15.5% YoY) and FY28F VND 14,582bn (+16.0% YoY), driven by a Global IT growth reacceleration (FY27F: +16.7%). Our DCF (FCFF)-based target price is VND 91,570; at the current two-year-low price of VND 62,900 (24/07/26), FPT trades at just 10.5x 2026F P/E versus a 5-year median above 18x, implying a 46% expected return (BUY). Risks: soft US/global IT spending, tariff-related deal delays, and JPY/USD FX swings.</a:t>
             </a:r>
           </a:p>
           <a:p>
@@ -31226,7 +31226,7 @@
                           <a:effectLst/>
                           <a:latin typeface="Noto Sans" panose="020B0502040504020204" pitchFamily="34" charset="0"/>
                         </a:rPr>
-                        <a:t>15,101</a:t>
+                        <a:t>15,036</a:t>
                       </a:r>
                     </a:p>
                   </a:txBody>
@@ -31558,7 +31558,7 @@
                           <a:effectLst/>
                           <a:latin typeface="Noto Sans" panose="020B0502040504020204" pitchFamily="34" charset="0"/>
                         </a:rPr>
-                        <a:t>12,625</a:t>
+                        <a:t>12,571</a:t>
                       </a:r>
                     </a:p>
                   </a:txBody>
@@ -31890,7 +31890,7 @@
                           <a:effectLst/>
                           <a:latin typeface="Noto Sans" panose="020B0502040504020204" pitchFamily="34" charset="0"/>
                         </a:rPr>
-                        <a:t>6,975</a:t>
+                        <a:t>6,945</a:t>
                       </a:r>
                     </a:p>
                   </a:txBody>
@@ -32222,7 +32222,7 @@
                           <a:effectLst/>
                           <a:latin typeface="Noto Sans" panose="020B0502040504020204" pitchFamily="34" charset="0"/>
                         </a:rPr>
-                        <a:t>27.0</a:t>
+                        <a:t>26.8</a:t>
                       </a:r>
                     </a:p>
                   </a:txBody>
@@ -32554,7 +32554,7 @@
                           <a:effectLst/>
                           <a:latin typeface="Noto Sans" panose="020B0502040504020204" pitchFamily="34" charset="0"/>
                         </a:rPr>
-                        <a:t>13.1</a:t>
+                        <a:t>13.2</a:t>
                       </a:r>
                     </a:p>
                   </a:txBody>
@@ -33238,7 +33238,7 @@
                           <a:effectLst/>
                           <a:latin typeface="Noto Sans" panose="020B0502040504020204" pitchFamily="34" charset="0"/>
                         </a:rPr>
-                        <a:t>102,839</a:t>
+                        <a:t>102,783</a:t>
                       </a:r>
                     </a:p>
                   </a:txBody>
@@ -33288,7 +33288,7 @@
                           <a:effectLst/>
                           <a:latin typeface="Noto Sans" panose="020B0502040504020204" pitchFamily="34" charset="0"/>
                         </a:rPr>
-                        <a:t>115,602</a:t>
+                        <a:t>115,547</a:t>
                       </a:r>
                     </a:p>
                   </a:txBody>
@@ -33604,7 +33604,7 @@
                           <a:effectLst/>
                           <a:latin typeface="Noto Sans" panose="020B0502040504020204" pitchFamily="34" charset="0"/>
                         </a:rPr>
-                        <a:t>58,193</a:t>
+                        <a:t>58,138</a:t>
                       </a:r>
                     </a:p>
                   </a:txBody>
@@ -33654,7 +33654,7 @@
                           <a:effectLst/>
                           <a:latin typeface="Noto Sans" panose="020B0502040504020204" pitchFamily="34" charset="0"/>
                         </a:rPr>
-                        <a:t>68,181</a:t>
+                        <a:t>68,126</a:t>
                       </a:r>
                     </a:p>
                   </a:txBody>
@@ -33964,7 +33964,7 @@
                           <a:effectLst/>
                           <a:latin typeface="Noto Sans" panose="020B0502040504020204" pitchFamily="34" charset="0"/>
                         </a:rPr>
-                        <a:t>29,709</a:t>
+                        <a:t>29,677</a:t>
                       </a:r>
                     </a:p>
                   </a:txBody>
@@ -34014,7 +34014,7 @@
                           <a:effectLst/>
                           <a:latin typeface="Noto Sans" panose="020B0502040504020204" pitchFamily="34" charset="0"/>
                         </a:rPr>
-                        <a:t>35,440</a:t>
+                        <a:t>35,407</a:t>
                       </a:r>
                     </a:p>
                   </a:txBody>
@@ -38083,7 +38083,7 @@
                 <a:ea typeface="Noto Sans" panose="020B0502040504020204" pitchFamily="34" charset="0"/>
                 <a:cs typeface="Noto Sans" panose="020B0502040504020204" pitchFamily="34" charset="0"/>
               </a:rPr>
-              <a:t>Chúng tôi dự phóng LNST-CĐTS FY26F đạt 10,884 tỷ đồng (+15.0% CK), FY27F đạt 12,625 tỷ đồng (+16.0% CK) và FY28F đạt 14,582 tỷ đồng (+15.5% CK), dẫn dắt bởi đà tăng tốc trở lại của CNTT nước ngoài (FY27F: +16.7%). Giá mục tiêu theo DCF (FCFF) là 91,570 đồng/cp; tại thị giá đáy 2 năm 62,900 đồng (24/07/26), FPT giao dịch ở mức 10.5x P/E 2026F so với trung vị 5 năm trên 18x, tương ứng lợi nhuận kỳ vọng 46% (MUA). Rủi ro: chi tiêu CNTT tại Mỹ/toàn cầu suy yếu, trì hoãn hợp đồng do thuế quan, biến động tỷ giá JPY/USD.</a:t>
+              <a:t>Chúng tôi dự phóng LNST-CĐTS FY26F đạt 10,884 tỷ đồng (+15.0% CK), FY27F đạt 12,571 tỷ đồng (+15.5% CK) và FY28F đạt 14,582 tỷ đồng (+16.0% CK), dẫn dắt bởi đà tăng tốc trở lại của CNTT nước ngoài (FY27F: +16.7%). Giá mục tiêu theo DCF (FCFF) là 91,570 đồng/cp; tại thị giá đáy 2 năm 62,900 đồng (24/07/26), FPT giao dịch ở mức 10.5x P/E 2026F so với trung vị 5 năm trên 18x, tương ứng lợi nhuận kỳ vọng 46% (MUA). Rủi ro: chi tiêu CNTT tại Mỹ/toàn cầu suy yếu, trì hoãn hợp đồng do thuế quan, biến động tỷ giá JPY/USD.</a:t>
             </a:r>
             <a:endParaRPr kumimoji="1" lang="en-US" altLang="ko-KR" sz="800" b="0" dirty="0">
               <a:solidFill>
@@ -39517,7 +39517,7 @@
                           <a:effectLst/>
                           <a:latin typeface="Noto Sans" panose="020B0502040504020204" pitchFamily="34" charset="0"/>
                         </a:rPr>
-                        <a:t>15,101</a:t>
+                        <a:t>15,036</a:t>
                       </a:r>
                     </a:p>
                   </a:txBody>
@@ -39849,7 +39849,7 @@
                           <a:effectLst/>
                           <a:latin typeface="Noto Sans" panose="020B0502040504020204" pitchFamily="34" charset="0"/>
                         </a:rPr>
-                        <a:t>12,625</a:t>
+                        <a:t>12,571</a:t>
                       </a:r>
                     </a:p>
                   </a:txBody>
@@ -40181,7 +40181,7 @@
                           <a:effectLst/>
                           <a:latin typeface="Noto Sans" panose="020B0502040504020204" pitchFamily="34" charset="0"/>
                         </a:rPr>
-                        <a:t>6,975</a:t>
+                        <a:t>6,945</a:t>
                       </a:r>
                     </a:p>
                   </a:txBody>
@@ -40513,7 +40513,7 @@
                           <a:effectLst/>
                           <a:latin typeface="Noto Sans" panose="020B0502040504020204" pitchFamily="34" charset="0"/>
                         </a:rPr>
-                        <a:t>27.0</a:t>
+                        <a:t>26.8</a:t>
                       </a:r>
                     </a:p>
                   </a:txBody>
@@ -40845,7 +40845,7 @@
                           <a:effectLst/>
                           <a:latin typeface="Noto Sans" panose="020B0502040504020204" pitchFamily="34" charset="0"/>
                         </a:rPr>
-                        <a:t>13.1</a:t>
+                        <a:t>13.2</a:t>
                       </a:r>
                     </a:p>
                   </a:txBody>
@@ -41538,7 +41538,7 @@
                           <a:effectLst/>
                           <a:latin typeface="Noto Sans" panose="020B0502040504020204" pitchFamily="34" charset="0"/>
                         </a:rPr>
-                        <a:t>102,839</a:t>
+                        <a:t>102,783</a:t>
                       </a:r>
                     </a:p>
                   </a:txBody>
@@ -41588,7 +41588,7 @@
                           <a:effectLst/>
                           <a:latin typeface="Noto Sans" panose="020B0502040504020204" pitchFamily="34" charset="0"/>
                         </a:rPr>
-                        <a:t>115,602</a:t>
+                        <a:t>115,547</a:t>
                       </a:r>
                     </a:p>
                   </a:txBody>
@@ -41907,7 +41907,7 @@
                           <a:effectLst/>
                           <a:latin typeface="Noto Sans" panose="020B0502040504020204" pitchFamily="34" charset="0"/>
                         </a:rPr>
-                        <a:t>58,193</a:t>
+                        <a:t>58,138</a:t>
                       </a:r>
                     </a:p>
                   </a:txBody>
@@ -41957,7 +41957,7 @@
                           <a:effectLst/>
                           <a:latin typeface="Noto Sans" panose="020B0502040504020204" pitchFamily="34" charset="0"/>
                         </a:rPr>
-                        <a:t>68,181</a:t>
+                        <a:t>68,126</a:t>
                       </a:r>
                     </a:p>
                   </a:txBody>
@@ -42267,7 +42267,7 @@
                           <a:effectLst/>
                           <a:latin typeface="Noto Sans" panose="020B0502040504020204" pitchFamily="34" charset="0"/>
                         </a:rPr>
-                        <a:t>29,709</a:t>
+                        <a:t>29,677</a:t>
                       </a:r>
                     </a:p>
                   </a:txBody>
@@ -42317,7 +42317,7 @@
                           <a:effectLst/>
                           <a:latin typeface="Noto Sans" panose="020B0502040504020204" pitchFamily="34" charset="0"/>
                         </a:rPr>
-                        <a:t>35,440</a:t>
+                        <a:t>35,407</a:t>
                       </a:r>
                     </a:p>
                   </a:txBody>

--- a/MASVN_RS_WM_2H26_outlook_Equity_VN_2026_STBFPT_24July2026.pptx
+++ b/MASVN_RS_WM_2H26_outlook_Equity_VN_2026_STBFPT_24July2026.pptx
@@ -28404,7 +28404,7 @@
                           <a:ea typeface="Noto Sans" panose="020B0502040504020204" pitchFamily="34" charset="0"/>
                           <a:cs typeface="Noto Sans" panose="020B0502040504020204" pitchFamily="34" charset="0"/>
                         </a:rPr>
-                        <a:t>15.2</a:t>
+                        <a:t>13.1</a:t>
                       </a:r>
                     </a:p>
                   </a:txBody>
@@ -29162,7 +29162,7 @@
                           <a:ea typeface="Noto Sans" panose="020B0502040504020204" pitchFamily="34" charset="0"/>
                           <a:cs typeface="Noto Sans" panose="020B0502040504020204" pitchFamily="34" charset="0"/>
                         </a:rPr>
-                        <a:t>91,570</a:t>
+                        <a:t>78,750</a:t>
                       </a:r>
                       <a:endParaRPr lang="ko-KR" altLang="en-US" sz="900" b="1" kern="100" spc="0" baseline="0" dirty="0">
                         <a:solidFill>
@@ -29505,7 +29505,7 @@
                           <a:ea typeface="KoPub돋움체_Pro Medium" pitchFamily="18" charset="-127"/>
                           <a:cs typeface="Noto Sans" panose="020B0502040504020204" pitchFamily="34" charset="0"/>
                         </a:rPr>
-                        <a:t>46%</a:t>
+                        <a:t>25%</a:t>
                       </a:r>
                       <a:endParaRPr lang="ko-KR" altLang="en-US" sz="900" b="0" kern="100" spc="0" baseline="0" dirty="0">
                         <a:solidFill>
@@ -29670,7 +29670,7 @@
                 <a:ea typeface="Noto Sans" panose="020B0502040504020204" pitchFamily="34" charset="0"/>
                 <a:cs typeface="Noto Sans" panose="020B0502040504020204" pitchFamily="34" charset="0"/>
               </a:rPr>
-              <a:t>1H26 results (new reporting basis): </a:t>
+              <a:t>1H26 results: </a:t>
             </a:r>
             <a:r>
               <a:rPr kumimoji="1" lang="en-US" altLang="ko-KR" sz="800" dirty="0">
@@ -29681,7 +29681,7 @@
                 <a:ea typeface="Noto Sans" panose="020B0502040504020204" pitchFamily="34" charset="0"/>
                 <a:cs typeface="Noto Sans" panose="020B0502040504020204" pitchFamily="34" charset="0"/>
               </a:rPr>
-              <a:t>1H26 (cumulative): revenue VND 26,269bn (+12.6% YoY) and PBT VND 5,714bn (+18.1% YoY), completing 45%/49% of the FY26 revenue/PBT plan. 2Q26 alone: revenue VND 13,789bn, PBT VND 2,910bn (vs VND 12,480bn / VND 2,804bn in 1Q26) and NPATMI VND 2,568bn (+14% YoY); reported 2Q26 revenue fell 17% YoY purely on the Telecom deconsolidation. By segment (1H26): Technology revenue VND 23,138bn (+15% YoY; 88% of group revenue) and PBT VND 3,314bn (+16.9% YoY), with Global IT +13.4% and Domestic IT +22.5%; Education, investment &amp; others VND 3,131bn (-2.1% YoY).</a:t>
+              <a:t>1H26 (cumulative): revenue VND 26,269bn (+12.6% YoY) and PBT VND 5,714bn (+18.1% YoY), completing 45%/49% of the FY26 revenue/PBT plan. 2Q26 alone: revenue VND 13,789bn, PBT VND 2,910bn (vs VND 12,480bn / VND 2,804bn in 1Q26) and NPATMI VND 2,568bn (+14% YoY). By segment (1H26): Technology revenue VND 23,138bn (+15% YoY; 88% of group revenue) and PBT VND 3,314bn (+16.9% YoY), with Global IT +13.4% and Domestic IT +22.5%; Education, investment &amp; others VND 3,131bn (-2.1% YoY).</a:t>
             </a:r>
             <a:endParaRPr kumimoji="1" lang="en-US" altLang="ko-KR" sz="800" b="1" dirty="0">
               <a:solidFill>
@@ -29715,7 +29715,7 @@
                 <a:ea typeface="Noto Sans" panose="020B0502040504020204" pitchFamily="34" charset="0"/>
                 <a:cs typeface="Noto Sans" panose="020B0502040504020204" pitchFamily="34" charset="0"/>
               </a:rPr>
-              <a:t>Basis change — FPT Telecom deconsolidated: </a:t>
+              <a:t>Government digitalization anchors the domestic pipeline: </a:t>
             </a:r>
             <a:r>
               <a:rPr kumimoji="1" lang="en-US" altLang="ko-KR" sz="800" dirty="0" err="1">
@@ -29726,7 +29726,7 @@
                 <a:ea typeface="Noto Sans" panose="020B0502040504020204" pitchFamily="34" charset="0"/>
                 <a:cs typeface="Noto Sans" panose="020B0502040504020204" pitchFamily="34" charset="0"/>
               </a:rPr>
-              <a:t>From FY26, FPT Telecom is accounted for under the equity method (2025 restated for comparison). Reported revenue therefore steps down (FY26F: VND 57,195bn) while associate income (~VND 2.9tn in FY26F) flows through the equity-method line — lifting net margin to ~19% and reducing minority leakage, so EPS grows faster than NPATMI (FY26F: +18.5% vs +15.0%).</a:t>
+              <a:t>Domestic IT was the fastest-growing segment in 6M26 at VND 4,236bn (+22.5% YoY), with segment PBT doubling YoY to VND 308bn, on public-sector project wins under the national digital-transformation programme — a multi-year pipeline far less exposed to the global IT-spending cycle. Global IT (VND 18,902bn, +13.4% YoY) is expected to reaccelerate to +16.7% in FY27F, led by Japan (+22%) and the EU (+18%), as AI and digital-transformation mandates convert into bookings. Education capacity (the Hue complex) and data-center expansion provide medium-term optionality.</a:t>
             </a:r>
             <a:endParaRPr kumimoji="1" lang="en-US" altLang="ko-KR" sz="800" b="1" dirty="0">
               <a:solidFill>
@@ -29771,7 +29771,7 @@
                 <a:ea typeface="Noto Sans" panose="020B0502040504020204" pitchFamily="34" charset="0"/>
                 <a:cs typeface="Noto Sans" panose="020B0502040504020204" pitchFamily="34" charset="0"/>
               </a:rPr>
-              <a:t>We forecast FY26F NPATMI of VND 10,884bn (+15.0% YoY), FY27F VND 12,571bn (+15.5% YoY) and FY28F VND 14,582bn (+16.0% YoY), driven by a Global IT growth reacceleration (FY27F: +16.7%). Our DCF (FCFF)-based target price is VND 91,570; at the current two-year-low price of VND 62,900 (24/07/26), FPT trades at just 10.5x 2026F P/E versus a 5-year median above 18x, implying a 46% expected return (BUY). Risks: soft US/global IT spending, tariff-related deal delays, and JPY/USD FX swings.</a:t>
+              <a:t>We forecast FY26F NPATMI of VND 10,884bn (+15.0% YoY), FY27F VND 12,451bn (+14.4% YoY) and FY28F VND 14,080bn (+13.1% YoY), with associate income from FPT Telecom assumed to grow ~15% p.a. Our DCF (FCFF)-based target price is VND 78,750; at the current price of VND 62,900 (24/07/26) FPT trades at 10.5x 2026F P/E versus a 5-year median above 18x, implying a 25% expected return (BUY). Risks: soft US/global IT spending, tariff-related deal delays, and JPY/USD FX swings.</a:t>
             </a:r>
           </a:p>
           <a:p>
@@ -31226,7 +31226,7 @@
                           <a:effectLst/>
                           <a:latin typeface="Noto Sans" panose="020B0502040504020204" pitchFamily="34" charset="0"/>
                         </a:rPr>
-                        <a:t>15,036</a:t>
+                        <a:t>14,892</a:t>
                       </a:r>
                     </a:p>
                   </a:txBody>
@@ -31272,7 +31272,7 @@
                           <a:effectLst/>
                           <a:latin typeface="Noto Sans" panose="020B0502040504020204" pitchFamily="34" charset="0"/>
                         </a:rPr>
-                        <a:t>17,441</a:t>
+                        <a:t>16,841</a:t>
                       </a:r>
                     </a:p>
                   </a:txBody>
@@ -31558,7 +31558,7 @@
                           <a:effectLst/>
                           <a:latin typeface="Noto Sans" panose="020B0502040504020204" pitchFamily="34" charset="0"/>
                         </a:rPr>
-                        <a:t>12,571</a:t>
+                        <a:t>12,451</a:t>
                       </a:r>
                     </a:p>
                   </a:txBody>
@@ -31604,7 +31604,7 @@
                           <a:effectLst/>
                           <a:latin typeface="Noto Sans" panose="020B0502040504020204" pitchFamily="34" charset="0"/>
                         </a:rPr>
-                        <a:t>14,582</a:t>
+                        <a:t>14,080</a:t>
                       </a:r>
                     </a:p>
                   </a:txBody>
@@ -31890,7 +31890,7 @@
                           <a:effectLst/>
                           <a:latin typeface="Noto Sans" panose="020B0502040504020204" pitchFamily="34" charset="0"/>
                         </a:rPr>
-                        <a:t>6,945</a:t>
+                        <a:t>6,879</a:t>
                       </a:r>
                     </a:p>
                   </a:txBody>
@@ -31936,7 +31936,7 @@
                           <a:effectLst/>
                           <a:latin typeface="Noto Sans" panose="020B0502040504020204" pitchFamily="34" charset="0"/>
                         </a:rPr>
-                        <a:t>8,056</a:t>
+                        <a:t>7,779</a:t>
                       </a:r>
                     </a:p>
                   </a:txBody>
@@ -32222,7 +32222,7 @@
                           <a:effectLst/>
                           <a:latin typeface="Noto Sans" panose="020B0502040504020204" pitchFamily="34" charset="0"/>
                         </a:rPr>
-                        <a:t>26.8</a:t>
+                        <a:t>26.6</a:t>
                       </a:r>
                     </a:p>
                   </a:txBody>
@@ -32268,7 +32268,7 @@
                           <a:effectLst/>
                           <a:latin typeface="Noto Sans" panose="020B0502040504020204" pitchFamily="34" charset="0"/>
                         </a:rPr>
-                        <a:t>26.3</a:t>
+                        <a:t>25.4</a:t>
                       </a:r>
                     </a:p>
                   </a:txBody>
@@ -32505,7 +32505,7 @@
                           <a:effectLst/>
                           <a:latin typeface="Noto Sans" panose="020B0502040504020204" pitchFamily="34" charset="0"/>
                         </a:rPr>
-                        <a:t>15.2</a:t>
+                        <a:t>13.1</a:t>
                       </a:r>
                     </a:p>
                   </a:txBody>
@@ -32554,7 +32554,7 @@
                           <a:effectLst/>
                           <a:latin typeface="Noto Sans" panose="020B0502040504020204" pitchFamily="34" charset="0"/>
                         </a:rPr>
-                        <a:t>13.2</a:t>
+                        <a:t>11.4</a:t>
                       </a:r>
                     </a:p>
                   </a:txBody>
@@ -32600,7 +32600,7 @@
                           <a:effectLst/>
                           <a:latin typeface="Noto Sans" panose="020B0502040504020204" pitchFamily="34" charset="0"/>
                         </a:rPr>
-                        <a:t>11.4</a:t>
+                        <a:t>10.1</a:t>
                       </a:r>
                     </a:p>
                   </a:txBody>
@@ -32837,7 +32837,7 @@
                           <a:effectLst/>
                           <a:latin typeface="Noto Sans" panose="020B0502040504020204" pitchFamily="34" charset="0"/>
                         </a:rPr>
-                        <a:t>3.7</a:t>
+                        <a:t>3.1</a:t>
                       </a:r>
                     </a:p>
                   </a:txBody>
@@ -32886,7 +32886,7 @@
                           <a:effectLst/>
                           <a:latin typeface="Noto Sans" panose="020B0502040504020204" pitchFamily="34" charset="0"/>
                         </a:rPr>
-                        <a:t>3.1</a:t>
+                        <a:t>2.7</a:t>
                       </a:r>
                     </a:p>
                   </a:txBody>
@@ -32932,7 +32932,7 @@
                           <a:effectLst/>
                           <a:latin typeface="Noto Sans" panose="020B0502040504020204" pitchFamily="34" charset="0"/>
                         </a:rPr>
-                        <a:t>2.6</a:t>
+                        <a:t>2.2</a:t>
                       </a:r>
                     </a:p>
                   </a:txBody>
@@ -33238,7 +33238,7 @@
                           <a:effectLst/>
                           <a:latin typeface="Noto Sans" panose="020B0502040504020204" pitchFamily="34" charset="0"/>
                         </a:rPr>
-                        <a:t>102,783</a:t>
+                        <a:t>102,661</a:t>
                       </a:r>
                     </a:p>
                   </a:txBody>
@@ -33288,7 +33288,7 @@
                           <a:effectLst/>
                           <a:latin typeface="Noto Sans" panose="020B0502040504020204" pitchFamily="34" charset="0"/>
                         </a:rPr>
-                        <a:t>115,547</a:t>
+                        <a:t>114,915</a:t>
                       </a:r>
                     </a:p>
                   </a:txBody>
@@ -33604,7 +33604,7 @@
                           <a:effectLst/>
                           <a:latin typeface="Noto Sans" panose="020B0502040504020204" pitchFamily="34" charset="0"/>
                         </a:rPr>
-                        <a:t>58,138</a:t>
+                        <a:t>58,016</a:t>
                       </a:r>
                     </a:p>
                   </a:txBody>
@@ -33654,7 +33654,7 @@
                           <a:effectLst/>
                           <a:latin typeface="Noto Sans" panose="020B0502040504020204" pitchFamily="34" charset="0"/>
                         </a:rPr>
-                        <a:t>68,126</a:t>
+                        <a:t>67,493</a:t>
                       </a:r>
                     </a:p>
                   </a:txBody>
@@ -33964,7 +33964,7 @@
                           <a:effectLst/>
                           <a:latin typeface="Noto Sans" panose="020B0502040504020204" pitchFamily="34" charset="0"/>
                         </a:rPr>
-                        <a:t>29,677</a:t>
+                        <a:t>29,605</a:t>
                       </a:r>
                     </a:p>
                   </a:txBody>
@@ -34014,7 +34014,7 @@
                           <a:effectLst/>
                           <a:latin typeface="Noto Sans" panose="020B0502040504020204" pitchFamily="34" charset="0"/>
                         </a:rPr>
-                        <a:t>35,407</a:t>
+                        <a:t>35,036</a:t>
                       </a:r>
                     </a:p>
                   </a:txBody>
@@ -35928,7 +35928,7 @@
                           <a:ea typeface="Noto Sans" panose="020B0502040504020204" pitchFamily="34" charset="0"/>
                           <a:cs typeface="Noto Sans" panose="020B0502040504020204" pitchFamily="34" charset="0"/>
                         </a:rPr>
-                        <a:t>15.2</a:t>
+                        <a:t>13.1</a:t>
                       </a:r>
                     </a:p>
                   </a:txBody>
@@ -37331,7 +37331,7 @@
                           <a:ea typeface="Noto Sans" panose="020B0502040504020204" pitchFamily="34" charset="0"/>
                           <a:cs typeface="Noto Sans" panose="020B0502040504020204" pitchFamily="34" charset="0"/>
                         </a:rPr>
-                        <a:t>91,570</a:t>
+                        <a:t>78,750</a:t>
                       </a:r>
                       <a:endParaRPr lang="ko-KR" altLang="en-US" sz="900" b="1" kern="100" spc="0" baseline="0" dirty="0">
                         <a:solidFill>
@@ -37770,7 +37770,7 @@
                           <a:ea typeface="KoPub돋움체_Pro Medium" pitchFamily="18" charset="-127"/>
                           <a:cs typeface="Noto Sans" panose="020B0502040504020204" pitchFamily="34" charset="0"/>
                         </a:rPr>
-                        <a:t>46%</a:t>
+                        <a:t>25%</a:t>
                       </a:r>
                       <a:endParaRPr lang="ko-KR" altLang="en-US" sz="900" b="0" kern="100" spc="0" baseline="0" dirty="0">
                         <a:solidFill>
@@ -37998,7 +37998,7 @@
                 <a:ea typeface="Noto Sans" panose="020B0502040504020204" pitchFamily="34" charset="0"/>
                 <a:cs typeface="Noto Sans" panose="020B0502040504020204" pitchFamily="34" charset="0"/>
               </a:rPr>
-              <a:t>KQKD 1H26 (theo chuẩn hợp nhất mới): </a:t>
+              <a:t>KQKD 1H26: </a:t>
             </a:r>
             <a:r>
               <a:rPr kumimoji="1" lang="vi-VN" altLang="ko-KR" sz="800" b="0" dirty="0">
@@ -38009,7 +38009,7 @@
                 <a:ea typeface="Noto Sans" panose="020B0502040504020204" pitchFamily="34" charset="0"/>
                 <a:cs typeface="Noto Sans" panose="020B0502040504020204" pitchFamily="34" charset="0"/>
               </a:rPr>
-              <a:t>Lũy kế 1H26: doanh thu 26,269 tỷ đồng (+12.6% CK), LNTT 5,714 tỷ đồng (+18.1% CK), hoàn thành 45%/49% kế hoạch doanh thu/LNTT năm 2026. Riêng Q2/2026: doanh thu 13,789 tỷ đồng, LNTT 2,910 tỷ đồng (so với 12,480 tỷ / 2,804 tỷ trong Q1/2026), LNST-CĐTS 2,568 tỷ đồng (+14% CK); doanh thu Q2/2026 giảm 17% CK hoàn toàn do FPT Telecom không còn hợp nhất. Theo mảng (1H26): khối Công nghệ đạt doanh thu 23,138 tỷ đồng (+15% CK; 88% doanh thu toàn tập đoàn), LNTT 3,314 tỷ đồng (+16.9% CK); CNTT nước ngoài +13.4%, CNTT trong nước +22.5%; mảng Giáo dục, đầu tư &amp; khác đạt 3,131 tỷ đồng (-2.1% CK).</a:t>
+              <a:t>Lũy kế 1H26: doanh thu 26,269 tỷ đồng (+12.6% CK), LNTT 5,714 tỷ đồng (+18.1% CK), hoàn thành 45%/49% kế hoạch doanh thu/LNTT năm 2026. Riêng Q2/2026: doanh thu 13,789 tỷ đồng, LNTT 2,910 tỷ đồng (so với 12,480 tỷ / 2,804 tỷ trong Q1/2026), LNST-CĐTS 2,568 tỷ đồng (+14% CK). Theo mảng (1H26): khối Công nghệ đạt doanh thu 23,138 tỷ đồng (+15% CK; 88% doanh thu tập đoàn), LNTT 3,314 tỷ đồng (+16.9% CK); CNTT nước ngoài +13.4%, CNTT trong nước +22.5%; mảng Giáo dục, đầu tư &amp; khác đạt 3,131 tỷ đồng (-2.1% CK).</a:t>
             </a:r>
           </a:p>
           <a:p>
@@ -38035,7 +38035,7 @@
                 <a:ea typeface="Noto Sans" panose="020B0502040504020204" pitchFamily="34" charset="0"/>
                 <a:cs typeface="Noto Sans" panose="020B0502040504020204" pitchFamily="34" charset="0"/>
               </a:rPr>
-              <a:t>Thay đổi chuẩn hợp nhất — FPT Telecom chuyển sang phương pháp VCSH: </a:t>
+              <a:t>Số hóa khu vực công dẫn dắt danh mục dự án trong nước: </a:t>
             </a:r>
             <a:r>
               <a:rPr kumimoji="1" lang="vi-VN" altLang="ko-KR" sz="800" b="0" dirty="0">
@@ -38046,7 +38046,7 @@
                 <a:ea typeface="Noto Sans" panose="020B0502040504020204" pitchFamily="34" charset="0"/>
                 <a:cs typeface="Noto Sans" panose="020B0502040504020204" pitchFamily="34" charset="0"/>
               </a:rPr>
-              <a:t>Từ FY26, FPT Telecom được hạch toán theo phương pháp vốn chủ sở hữu (số liệu 2025 được điều chỉnh lại để so sánh). Doanh thu báo cáo do đó giảm về 57,195 tỷ đồng cho FY26F, trong khi lợi nhuận từ công ty liên kết (~2.9 nghìn tỷ FY26F) ghi nhận qua dòng liên doanh liên kết — giúp biên LN ròng tăng lên ~19% và giảm lợi ích cổ đông thiểu số, nhờ đó EPS tăng nhanh hơn LNST-CĐTS (FY26F: +18.5% so với +15.0%).</a:t>
+              <a:t>CNTT trong nước là mảng tăng trưởng nhanh nhất trong 6T26, đạt 4,236 tỷ đồng (+22.5% CK) với LNTT mảng tăng gấp đôi lên 308 tỷ đồng, nhờ trúng thầu các dự án khu vực công thuộc chương trình chuyển đổi số quốc gia — nguồn việc nhiều năm và ít chịu ảnh hưởng từ chu kỳ chi tiêu CNTT toàn cầu. CNTT nước ngoài (18,902 tỷ đồng, +13.4% CK) dự kiến tăng tốc trở lại lên +16.7% trong FY27F, dẫn dắt bởi Nhật Bản (+22%) và châu Âu (+18%) khi nhu cầu AI và chuyển đổi số chuyển hóa thành hợp đồng. Năng lực giáo dục (tổ hợp Huế) và mở rộng trung tâm dữ liệu tạo dư địa trung hạn.</a:t>
             </a:r>
           </a:p>
           <a:p>
@@ -38083,7 +38083,7 @@
                 <a:ea typeface="Noto Sans" panose="020B0502040504020204" pitchFamily="34" charset="0"/>
                 <a:cs typeface="Noto Sans" panose="020B0502040504020204" pitchFamily="34" charset="0"/>
               </a:rPr>
-              <a:t>Chúng tôi dự phóng LNST-CĐTS FY26F đạt 10,884 tỷ đồng (+15.0% CK), FY27F đạt 12,571 tỷ đồng (+15.5% CK) và FY28F đạt 14,582 tỷ đồng (+16.0% CK), dẫn dắt bởi đà tăng tốc trở lại của CNTT nước ngoài (FY27F: +16.7%). Giá mục tiêu theo DCF (FCFF) là 91,570 đồng/cp; tại thị giá đáy 2 năm 62,900 đồng (24/07/26), FPT giao dịch ở mức 10.5x P/E 2026F so với trung vị 5 năm trên 18x, tương ứng lợi nhuận kỳ vọng 46% (MUA). Rủi ro: chi tiêu CNTT tại Mỹ/toàn cầu suy yếu, trì hoãn hợp đồng do thuế quan, biến động tỷ giá JPY/USD.</a:t>
+              <a:t>Chúng tôi dự phóng LNST-CĐTS FY26F đạt 10,884 tỷ đồng (+15.0% CK), FY27F đạt 12,451 tỷ đồng (+14.4% CK) và FY28F đạt 14,080 tỷ đồng (+13.1% CK), với giả định lợi nhuận từ FPT Telecom tăng ~15%/năm. Giá mục tiêu theo DCF (FCFF) là 78,750 đồng/cp; tại thị giá 62,900 đồng (24/07/26), FPT giao dịch ở mức 10.5x P/E 2026F so với trung vị 5 năm trên 18x, tương ứng lợi nhuận kỳ vọng 25% (MUA). Rủi ro: chi tiêu CNTT tại Mỹ/toàn cầu suy yếu, trì hoãn hợp đồng do thuế quan, biến động tỷ giá JPY/USD.</a:t>
             </a:r>
             <a:endParaRPr kumimoji="1" lang="en-US" altLang="ko-KR" sz="800" b="0" dirty="0">
               <a:solidFill>
@@ -39517,7 +39517,7 @@
                           <a:effectLst/>
                           <a:latin typeface="Noto Sans" panose="020B0502040504020204" pitchFamily="34" charset="0"/>
                         </a:rPr>
-                        <a:t>15,036</a:t>
+                        <a:t>14,892</a:t>
                       </a:r>
                     </a:p>
                   </a:txBody>
@@ -39563,7 +39563,7 @@
                           <a:effectLst/>
                           <a:latin typeface="Noto Sans" panose="020B0502040504020204" pitchFamily="34" charset="0"/>
                         </a:rPr>
-                        <a:t>17,441</a:t>
+                        <a:t>16,841</a:t>
                       </a:r>
                     </a:p>
                   </a:txBody>
@@ -39849,7 +39849,7 @@
                           <a:effectLst/>
                           <a:latin typeface="Noto Sans" panose="020B0502040504020204" pitchFamily="34" charset="0"/>
                         </a:rPr>
-                        <a:t>12,571</a:t>
+                        <a:t>12,451</a:t>
                       </a:r>
                     </a:p>
                   </a:txBody>
@@ -39895,7 +39895,7 @@
                           <a:effectLst/>
                           <a:latin typeface="Noto Sans" panose="020B0502040504020204" pitchFamily="34" charset="0"/>
                         </a:rPr>
-                        <a:t>14,582</a:t>
+                        <a:t>14,080</a:t>
                       </a:r>
                     </a:p>
                   </a:txBody>
@@ -40181,7 +40181,7 @@
                           <a:effectLst/>
                           <a:latin typeface="Noto Sans" panose="020B0502040504020204" pitchFamily="34" charset="0"/>
                         </a:rPr>
-                        <a:t>6,945</a:t>
+                        <a:t>6,879</a:t>
                       </a:r>
                     </a:p>
                   </a:txBody>
@@ -40227,7 +40227,7 @@
                           <a:effectLst/>
                           <a:latin typeface="Noto Sans" panose="020B0502040504020204" pitchFamily="34" charset="0"/>
                         </a:rPr>
-                        <a:t>8,056</a:t>
+                        <a:t>7,779</a:t>
                       </a:r>
                     </a:p>
                   </a:txBody>
@@ -40513,7 +40513,7 @@
                           <a:effectLst/>
                           <a:latin typeface="Noto Sans" panose="020B0502040504020204" pitchFamily="34" charset="0"/>
                         </a:rPr>
-                        <a:t>26.8</a:t>
+                        <a:t>26.6</a:t>
                       </a:r>
                     </a:p>
                   </a:txBody>
@@ -40559,7 +40559,7 @@
                           <a:effectLst/>
                           <a:latin typeface="Noto Sans" panose="020B0502040504020204" pitchFamily="34" charset="0"/>
                         </a:rPr>
-                        <a:t>26.3</a:t>
+                        <a:t>25.4</a:t>
                       </a:r>
                     </a:p>
                   </a:txBody>
@@ -40796,7 +40796,7 @@
                           <a:effectLst/>
                           <a:latin typeface="Noto Sans" panose="020B0502040504020204" pitchFamily="34" charset="0"/>
                         </a:rPr>
-                        <a:t>15.2</a:t>
+                        <a:t>13.1</a:t>
                       </a:r>
                     </a:p>
                   </a:txBody>
@@ -40845,7 +40845,7 @@
                           <a:effectLst/>
                           <a:latin typeface="Noto Sans" panose="020B0502040504020204" pitchFamily="34" charset="0"/>
                         </a:rPr>
-                        <a:t>13.2</a:t>
+                        <a:t>11.4</a:t>
                       </a:r>
                     </a:p>
                   </a:txBody>
@@ -40891,7 +40891,7 @@
                           <a:effectLst/>
                           <a:latin typeface="Noto Sans" panose="020B0502040504020204" pitchFamily="34" charset="0"/>
                         </a:rPr>
-                        <a:t>11.4</a:t>
+                        <a:t>10.1</a:t>
                       </a:r>
                     </a:p>
                   </a:txBody>
@@ -41128,7 +41128,7 @@
                           <a:effectLst/>
                           <a:latin typeface="Noto Sans" panose="020B0502040504020204" pitchFamily="34" charset="0"/>
                         </a:rPr>
-                        <a:t>3.7</a:t>
+                        <a:t>3.1</a:t>
                       </a:r>
                     </a:p>
                   </a:txBody>
@@ -41177,7 +41177,7 @@
                           <a:effectLst/>
                           <a:latin typeface="Noto Sans" panose="020B0502040504020204" pitchFamily="34" charset="0"/>
                         </a:rPr>
-                        <a:t>3.1</a:t>
+                        <a:t>2.7</a:t>
                       </a:r>
                     </a:p>
                   </a:txBody>
@@ -41223,7 +41223,7 @@
                           <a:effectLst/>
                           <a:latin typeface="Noto Sans" panose="020B0502040504020204" pitchFamily="34" charset="0"/>
                         </a:rPr>
-                        <a:t>2.6</a:t>
+                        <a:t>2.2</a:t>
                       </a:r>
                     </a:p>
                   </a:txBody>
@@ -41538,7 +41538,7 @@
                           <a:effectLst/>
                           <a:latin typeface="Noto Sans" panose="020B0502040504020204" pitchFamily="34" charset="0"/>
                         </a:rPr>
-                        <a:t>102,783</a:t>
+                        <a:t>102,661</a:t>
                       </a:r>
                     </a:p>
                   </a:txBody>
@@ -41588,7 +41588,7 @@
                           <a:effectLst/>
                           <a:latin typeface="Noto Sans" panose="020B0502040504020204" pitchFamily="34" charset="0"/>
                         </a:rPr>
-                        <a:t>115,547</a:t>
+                        <a:t>114,915</a:t>
                       </a:r>
                     </a:p>
                   </a:txBody>
@@ -41907,7 +41907,7 @@
                           <a:effectLst/>
                           <a:latin typeface="Noto Sans" panose="020B0502040504020204" pitchFamily="34" charset="0"/>
                         </a:rPr>
-                        <a:t>58,138</a:t>
+                        <a:t>58,016</a:t>
                       </a:r>
                     </a:p>
                   </a:txBody>
@@ -41957,7 +41957,7 @@
                           <a:effectLst/>
                           <a:latin typeface="Noto Sans" panose="020B0502040504020204" pitchFamily="34" charset="0"/>
                         </a:rPr>
-                        <a:t>68,126</a:t>
+                        <a:t>67,493</a:t>
                       </a:r>
                     </a:p>
                   </a:txBody>
@@ -42267,7 +42267,7 @@
                           <a:effectLst/>
                           <a:latin typeface="Noto Sans" panose="020B0502040504020204" pitchFamily="34" charset="0"/>
                         </a:rPr>
-                        <a:t>29,677</a:t>
+                        <a:t>29,605</a:t>
                       </a:r>
                     </a:p>
                   </a:txBody>
@@ -42317,7 +42317,7 @@
                           <a:effectLst/>
                           <a:latin typeface="Noto Sans" panose="020B0502040504020204" pitchFamily="34" charset="0"/>
                         </a:rPr>
-                        <a:t>35,407</a:t>
+                        <a:t>35,036</a:t>
                       </a:r>
                     </a:p>
                   </a:txBody>

--- a/MASVN_RS_WM_2H26_outlook_Equity_VN_2026_STBFPT_24July2026.pptx
+++ b/MASVN_RS_WM_2H26_outlook_Equity_VN_2026_STBFPT_24July2026.pptx
@@ -28155,7 +28155,7 @@
                           <a:ea typeface="Noto Sans" panose="020B0502040504020204" pitchFamily="34" charset="0"/>
                           <a:cs typeface="Noto Sans" panose="020B0502040504020204" pitchFamily="34" charset="0"/>
                         </a:rPr>
-                        <a:t>10,884</a:t>
+                        <a:t>10,943</a:t>
                       </a:r>
                     </a:p>
                   </a:txBody>
@@ -28320,7 +28320,7 @@
                           <a:ea typeface="Noto Sans" panose="020B0502040504020204" pitchFamily="34" charset="0"/>
                           <a:cs typeface="Noto Sans" panose="020B0502040504020204" pitchFamily="34" charset="0"/>
                         </a:rPr>
-                        <a:t>18.5</a:t>
+                        <a:t>19.2</a:t>
                       </a:r>
                     </a:p>
                   </a:txBody>
@@ -28404,7 +28404,7 @@
                           <a:ea typeface="Noto Sans" panose="020B0502040504020204" pitchFamily="34" charset="0"/>
                           <a:cs typeface="Noto Sans" panose="020B0502040504020204" pitchFamily="34" charset="0"/>
                         </a:rPr>
-                        <a:t>13.1</a:t>
+                        <a:t>13.0</a:t>
                       </a:r>
                     </a:p>
                   </a:txBody>
@@ -29771,7 +29771,7 @@
                 <a:ea typeface="Noto Sans" panose="020B0502040504020204" pitchFamily="34" charset="0"/>
                 <a:cs typeface="Noto Sans" panose="020B0502040504020204" pitchFamily="34" charset="0"/>
               </a:rPr>
-              <a:t>We forecast FY26F NPATMI of VND 10,884bn (+15.0% YoY), FY27F VND 12,451bn (+14.4% YoY) and FY28F VND 14,080bn (+13.1% YoY), with associate income from FPT Telecom assumed to grow ~15% p.a. Our DCF (FCFF)-based target price is VND 78,750; at the current price of VND 62,900 (24/07/26) FPT trades at 10.5x 2026F P/E versus a 5-year median above 18x, implying a 25% expected return (BUY). Risks: soft US/global IT spending, tariff-related deal delays, and JPY/USD FX swings.</a:t>
+              <a:t>We forecast FY26F NPATMI of VND 10,943bn (+15.6% YoY), FY27F VND 12,518bn (+14.4% YoY) and FY28F VND 14,156bn (+13.1% YoY), with associate income from FPT Telecom assumed to grow ~15% p.a. Our DCF (FCFF)-based target price is VND 78,750; at the current price of VND 62,900 (24/07/26) FPT trades at 10.4x 2026F P/E versus a 5-year median above 18x, implying a 25% expected return (BUY). Risks: soft US/global IT spending, tariff-related deal delays, and JPY/USD FX swings.</a:t>
             </a:r>
           </a:p>
           <a:p>
@@ -30519,7 +30519,7 @@
                           <a:effectLst/>
                           <a:latin typeface="Noto Sans" panose="020B0502040504020204" pitchFamily="34" charset="0"/>
                         </a:rPr>
-                        <a:t>57,165</a:t>
+                        <a:t>57,284</a:t>
                       </a:r>
                     </a:p>
                   </a:txBody>
@@ -30572,7 +30572,7 @@
                           <a:effectLst/>
                           <a:latin typeface="Noto Sans" panose="020B0502040504020204" pitchFamily="34" charset="0"/>
                         </a:rPr>
-                        <a:t>65,914</a:t>
+                        <a:t>66,048</a:t>
                       </a:r>
                     </a:p>
                   </a:txBody>
@@ -30622,7 +30622,7 @@
                           <a:effectLst/>
                           <a:latin typeface="Noto Sans" panose="020B0502040504020204" pitchFamily="34" charset="0"/>
                         </a:rPr>
-                        <a:t>76,504</a:t>
+                        <a:t>76,654</a:t>
                       </a:r>
                     </a:p>
                   </a:txBody>
@@ -30851,7 +30851,7 @@
                           <a:effectLst/>
                           <a:latin typeface="Noto Sans" panose="020B0502040504020204" pitchFamily="34" charset="0"/>
                         </a:rPr>
-                        <a:t>9,741</a:t>
+                        <a:t>9,807</a:t>
                       </a:r>
                     </a:p>
                   </a:txBody>
@@ -30897,7 +30897,7 @@
                           <a:effectLst/>
                           <a:latin typeface="Noto Sans" panose="020B0502040504020204" pitchFamily="34" charset="0"/>
                         </a:rPr>
-                        <a:t>10,785</a:t>
+                        <a:t>10,859</a:t>
                       </a:r>
                     </a:p>
                   </a:txBody>
@@ -30940,7 +30940,7 @@
                           <a:effectLst/>
                           <a:latin typeface="Noto Sans" panose="020B0502040504020204" pitchFamily="34" charset="0"/>
                         </a:rPr>
-                        <a:t>12,242</a:t>
+                        <a:t>12,325</a:t>
                       </a:r>
                     </a:p>
                   </a:txBody>
@@ -31177,7 +31177,7 @@
                           <a:effectLst/>
                           <a:latin typeface="Noto Sans" panose="020B0502040504020204" pitchFamily="34" charset="0"/>
                         </a:rPr>
-                        <a:t>12,998</a:t>
+                        <a:t>13,069</a:t>
                       </a:r>
                     </a:p>
                   </a:txBody>
@@ -31226,7 +31226,7 @@
                           <a:effectLst/>
                           <a:latin typeface="Noto Sans" panose="020B0502040504020204" pitchFamily="34" charset="0"/>
                         </a:rPr>
-                        <a:t>14,892</a:t>
+                        <a:t>14,973</a:t>
                       </a:r>
                     </a:p>
                   </a:txBody>
@@ -31272,7 +31272,7 @@
                           <a:effectLst/>
                           <a:latin typeface="Noto Sans" panose="020B0502040504020204" pitchFamily="34" charset="0"/>
                         </a:rPr>
-                        <a:t>16,841</a:t>
+                        <a:t>16,931</a:t>
                       </a:r>
                     </a:p>
                   </a:txBody>
@@ -31509,7 +31509,7 @@
                           <a:effectLst/>
                           <a:latin typeface="Noto Sans" panose="020B0502040504020204" pitchFamily="34" charset="0"/>
                         </a:rPr>
-                        <a:t>10,884</a:t>
+                        <a:t>10,943</a:t>
                       </a:r>
                     </a:p>
                   </a:txBody>
@@ -31558,7 +31558,7 @@
                           <a:effectLst/>
                           <a:latin typeface="Noto Sans" panose="020B0502040504020204" pitchFamily="34" charset="0"/>
                         </a:rPr>
-                        <a:t>12,451</a:t>
+                        <a:t>12,518</a:t>
                       </a:r>
                     </a:p>
                   </a:txBody>
@@ -31604,7 +31604,7 @@
                           <a:effectLst/>
                           <a:latin typeface="Noto Sans" panose="020B0502040504020204" pitchFamily="34" charset="0"/>
                         </a:rPr>
-                        <a:t>14,080</a:t>
+                        <a:t>14,156</a:t>
                       </a:r>
                     </a:p>
                   </a:txBody>
@@ -31841,7 +31841,7 @@
                           <a:effectLst/>
                           <a:latin typeface="Noto Sans" panose="020B0502040504020204" pitchFamily="34" charset="0"/>
                         </a:rPr>
-                        <a:t>6,013</a:t>
+                        <a:t>6,046</a:t>
                       </a:r>
                     </a:p>
                   </a:txBody>
@@ -31890,7 +31890,7 @@
                           <a:effectLst/>
                           <a:latin typeface="Noto Sans" panose="020B0502040504020204" pitchFamily="34" charset="0"/>
                         </a:rPr>
-                        <a:t>6,879</a:t>
+                        <a:t>6,916</a:t>
                       </a:r>
                     </a:p>
                   </a:txBody>
@@ -31936,7 +31936,7 @@
                           <a:effectLst/>
                           <a:latin typeface="Noto Sans" panose="020B0502040504020204" pitchFamily="34" charset="0"/>
                         </a:rPr>
-                        <a:t>7,779</a:t>
+                        <a:t>7,821</a:t>
                       </a:r>
                     </a:p>
                   </a:txBody>
@@ -32173,7 +32173,7 @@
                           <a:effectLst/>
                           <a:latin typeface="Noto Sans" panose="020B0502040504020204" pitchFamily="34" charset="0"/>
                         </a:rPr>
-                        <a:t>27.4</a:t>
+                        <a:t>27.5</a:t>
                       </a:r>
                     </a:p>
                   </a:txBody>
@@ -32222,7 +32222,7 @@
                           <a:effectLst/>
                           <a:latin typeface="Noto Sans" panose="020B0502040504020204" pitchFamily="34" charset="0"/>
                         </a:rPr>
-                        <a:t>26.6</a:t>
+                        <a:t>26.7</a:t>
                       </a:r>
                     </a:p>
                   </a:txBody>
@@ -32268,7 +32268,7 @@
                           <a:effectLst/>
                           <a:latin typeface="Noto Sans" panose="020B0502040504020204" pitchFamily="34" charset="0"/>
                         </a:rPr>
-                        <a:t>25.4</a:t>
+                        <a:t>25.6</a:t>
                       </a:r>
                     </a:p>
                   </a:txBody>
@@ -32505,7 +32505,7 @@
                           <a:effectLst/>
                           <a:latin typeface="Noto Sans" panose="020B0502040504020204" pitchFamily="34" charset="0"/>
                         </a:rPr>
-                        <a:t>13.1</a:t>
+                        <a:t>13.0</a:t>
                       </a:r>
                     </a:p>
                   </a:txBody>
@@ -33185,7 +33185,7 @@
                           <a:effectLst/>
                           <a:latin typeface="Noto Sans" panose="020B0502040504020204" pitchFamily="34" charset="0"/>
                         </a:rPr>
-                        <a:t>91,879</a:t>
+                        <a:t>91,940</a:t>
                       </a:r>
                     </a:p>
                   </a:txBody>
@@ -33238,7 +33238,7 @@
                           <a:effectLst/>
                           <a:latin typeface="Noto Sans" panose="020B0502040504020204" pitchFamily="34" charset="0"/>
                         </a:rPr>
-                        <a:t>102,661</a:t>
+                        <a:t>102,790</a:t>
                       </a:r>
                     </a:p>
                   </a:txBody>
@@ -33288,7 +33288,7 @@
                           <a:effectLst/>
                           <a:latin typeface="Noto Sans" panose="020B0502040504020204" pitchFamily="34" charset="0"/>
                         </a:rPr>
-                        <a:t>114,915</a:t>
+                        <a:t>115,120</a:t>
                       </a:r>
                     </a:p>
                   </a:txBody>
@@ -33551,7 +33551,7 @@
                           <a:effectLst/>
                           <a:latin typeface="Noto Sans" panose="020B0502040504020204" pitchFamily="34" charset="0"/>
                         </a:rPr>
-                        <a:t>50,096</a:t>
+                        <a:t>50,157</a:t>
                       </a:r>
                     </a:p>
                   </a:txBody>
@@ -33604,7 +33604,7 @@
                           <a:effectLst/>
                           <a:latin typeface="Noto Sans" panose="020B0502040504020204" pitchFamily="34" charset="0"/>
                         </a:rPr>
-                        <a:t>58,016</a:t>
+                        <a:t>58,145</a:t>
                       </a:r>
                     </a:p>
                   </a:txBody>
@@ -33654,7 +33654,7 @@
                           <a:effectLst/>
                           <a:latin typeface="Noto Sans" panose="020B0502040504020204" pitchFamily="34" charset="0"/>
                         </a:rPr>
-                        <a:t>67,493</a:t>
+                        <a:t>67,699</a:t>
                       </a:r>
                     </a:p>
                   </a:txBody>
@@ -33911,7 +33911,7 @@
                           <a:effectLst/>
                           <a:latin typeface="Noto Sans" panose="020B0502040504020204" pitchFamily="34" charset="0"/>
                         </a:rPr>
-                        <a:t>25,074</a:t>
+                        <a:t>25,109</a:t>
                       </a:r>
                     </a:p>
                   </a:txBody>
@@ -33964,7 +33964,7 @@
                           <a:effectLst/>
                           <a:latin typeface="Noto Sans" panose="020B0502040504020204" pitchFamily="34" charset="0"/>
                         </a:rPr>
-                        <a:t>29,605</a:t>
+                        <a:t>29,681</a:t>
                       </a:r>
                     </a:p>
                   </a:txBody>
@@ -34014,7 +34014,7 @@
                           <a:effectLst/>
                           <a:latin typeface="Noto Sans" panose="020B0502040504020204" pitchFamily="34" charset="0"/>
                         </a:rPr>
-                        <a:t>35,036</a:t>
+                        <a:t>35,157</a:t>
                       </a:r>
                     </a:p>
                   </a:txBody>
@@ -35487,7 +35487,7 @@
                           <a:ea typeface="Noto Sans" panose="020B0502040504020204" pitchFamily="34" charset="0"/>
                           <a:cs typeface="Noto Sans" panose="020B0502040504020204" pitchFamily="34" charset="0"/>
                         </a:rPr>
-                        <a:t>10,884</a:t>
+                        <a:t>10,943</a:t>
                       </a:r>
                     </a:p>
                   </a:txBody>
@@ -35844,7 +35844,7 @@
                           <a:ea typeface="Noto Sans" panose="020B0502040504020204" pitchFamily="34" charset="0"/>
                           <a:cs typeface="Noto Sans" panose="020B0502040504020204" pitchFamily="34" charset="0"/>
                         </a:rPr>
-                        <a:t>18.5</a:t>
+                        <a:t>19.2</a:t>
                       </a:r>
                     </a:p>
                   </a:txBody>
@@ -35928,7 +35928,7 @@
                           <a:ea typeface="Noto Sans" panose="020B0502040504020204" pitchFamily="34" charset="0"/>
                           <a:cs typeface="Noto Sans" panose="020B0502040504020204" pitchFamily="34" charset="0"/>
                         </a:rPr>
-                        <a:t>13.1</a:t>
+                        <a:t>13.0</a:t>
                       </a:r>
                     </a:p>
                   </a:txBody>
@@ -38083,7 +38083,7 @@
                 <a:ea typeface="Noto Sans" panose="020B0502040504020204" pitchFamily="34" charset="0"/>
                 <a:cs typeface="Noto Sans" panose="020B0502040504020204" pitchFamily="34" charset="0"/>
               </a:rPr>
-              <a:t>Chúng tôi dự phóng LNST-CĐTS FY26F đạt 10,884 tỷ đồng (+15.0% CK), FY27F đạt 12,451 tỷ đồng (+14.4% CK) và FY28F đạt 14,080 tỷ đồng (+13.1% CK), với giả định lợi nhuận từ FPT Telecom tăng ~15%/năm. Giá mục tiêu theo DCF (FCFF) là 78,750 đồng/cp; tại thị giá 62,900 đồng (24/07/26), FPT giao dịch ở mức 10.5x P/E 2026F so với trung vị 5 năm trên 18x, tương ứng lợi nhuận kỳ vọng 25% (MUA). Rủi ro: chi tiêu CNTT tại Mỹ/toàn cầu suy yếu, trì hoãn hợp đồng do thuế quan, biến động tỷ giá JPY/USD.</a:t>
+              <a:t>Chúng tôi dự phóng LNST-CĐTS FY26F đạt 10,943 tỷ đồng (+15.6% CK), FY27F đạt 12,518 tỷ đồng (+14.4% CK) và FY28F đạt 14,156 tỷ đồng (+13.1% CK), với giả định lợi nhuận từ FPT Telecom tăng ~15%/năm. Giá mục tiêu theo DCF (FCFF) là 78,750 đồng/cp; tại thị giá 62,900 đồng (24/07/26), FPT giao dịch ở mức 10.4x P/E 2026F so với trung vị 5 năm trên 18x, tương ứng lợi nhuận kỳ vọng 25% (MUA). Rủi ro: chi tiêu CNTT tại Mỹ/toàn cầu suy yếu, trì hoãn hợp đồng do thuế quan, biến động tỷ giá JPY/USD.</a:t>
             </a:r>
             <a:endParaRPr kumimoji="1" lang="en-US" altLang="ko-KR" sz="800" b="0" dirty="0">
               <a:solidFill>
@@ -38810,7 +38810,7 @@
                           <a:effectLst/>
                           <a:latin typeface="Noto Sans" panose="020B0502040504020204" pitchFamily="34" charset="0"/>
                         </a:rPr>
-                        <a:t>57,165</a:t>
+                        <a:t>57,284</a:t>
                       </a:r>
                     </a:p>
                   </a:txBody>
@@ -38863,7 +38863,7 @@
                           <a:effectLst/>
                           <a:latin typeface="Noto Sans" panose="020B0502040504020204" pitchFamily="34" charset="0"/>
                         </a:rPr>
-                        <a:t>65,914</a:t>
+                        <a:t>66,048</a:t>
                       </a:r>
                     </a:p>
                   </a:txBody>
@@ -38913,7 +38913,7 @@
                           <a:effectLst/>
                           <a:latin typeface="Noto Sans" panose="020B0502040504020204" pitchFamily="34" charset="0"/>
                         </a:rPr>
-                        <a:t>76,504</a:t>
+                        <a:t>76,654</a:t>
                       </a:r>
                     </a:p>
                   </a:txBody>
@@ -39142,7 +39142,7 @@
                           <a:effectLst/>
                           <a:latin typeface="Noto Sans" panose="020B0502040504020204" pitchFamily="34" charset="0"/>
                         </a:rPr>
-                        <a:t>9,741</a:t>
+                        <a:t>9,807</a:t>
                       </a:r>
                     </a:p>
                   </a:txBody>
@@ -39188,7 +39188,7 @@
                           <a:effectLst/>
                           <a:latin typeface="Noto Sans" panose="020B0502040504020204" pitchFamily="34" charset="0"/>
                         </a:rPr>
-                        <a:t>10,785</a:t>
+                        <a:t>10,859</a:t>
                       </a:r>
                     </a:p>
                   </a:txBody>
@@ -39231,7 +39231,7 @@
                           <a:effectLst/>
                           <a:latin typeface="Noto Sans" panose="020B0502040504020204" pitchFamily="34" charset="0"/>
                         </a:rPr>
-                        <a:t>12,242</a:t>
+                        <a:t>12,325</a:t>
                       </a:r>
                     </a:p>
                   </a:txBody>
@@ -39468,7 +39468,7 @@
                           <a:effectLst/>
                           <a:latin typeface="Noto Sans" panose="020B0502040504020204" pitchFamily="34" charset="0"/>
                         </a:rPr>
-                        <a:t>12,998</a:t>
+                        <a:t>13,069</a:t>
                       </a:r>
                     </a:p>
                   </a:txBody>
@@ -39517,7 +39517,7 @@
                           <a:effectLst/>
                           <a:latin typeface="Noto Sans" panose="020B0502040504020204" pitchFamily="34" charset="0"/>
                         </a:rPr>
-                        <a:t>14,892</a:t>
+                        <a:t>14,973</a:t>
                       </a:r>
                     </a:p>
                   </a:txBody>
@@ -39563,7 +39563,7 @@
                           <a:effectLst/>
                           <a:latin typeface="Noto Sans" panose="020B0502040504020204" pitchFamily="34" charset="0"/>
                         </a:rPr>
-                        <a:t>16,841</a:t>
+                        <a:t>16,931</a:t>
                       </a:r>
                     </a:p>
                   </a:txBody>
@@ -39800,7 +39800,7 @@
                           <a:effectLst/>
                           <a:latin typeface="Noto Sans" panose="020B0502040504020204" pitchFamily="34" charset="0"/>
                         </a:rPr>
-                        <a:t>10,884</a:t>
+                        <a:t>10,943</a:t>
                       </a:r>
                     </a:p>
                   </a:txBody>
@@ -39849,7 +39849,7 @@
                           <a:effectLst/>
                           <a:latin typeface="Noto Sans" panose="020B0502040504020204" pitchFamily="34" charset="0"/>
                         </a:rPr>
-                        <a:t>12,451</a:t>
+                        <a:t>12,518</a:t>
                       </a:r>
                     </a:p>
                   </a:txBody>
@@ -39895,7 +39895,7 @@
                           <a:effectLst/>
                           <a:latin typeface="Noto Sans" panose="020B0502040504020204" pitchFamily="34" charset="0"/>
                         </a:rPr>
-                        <a:t>14,080</a:t>
+                        <a:t>14,156</a:t>
                       </a:r>
                     </a:p>
                   </a:txBody>
@@ -40132,7 +40132,7 @@
                           <a:effectLst/>
                           <a:latin typeface="Noto Sans" panose="020B0502040504020204" pitchFamily="34" charset="0"/>
                         </a:rPr>
-                        <a:t>6,013</a:t>
+                        <a:t>6,046</a:t>
                       </a:r>
                     </a:p>
                   </a:txBody>
@@ -40181,7 +40181,7 @@
                           <a:effectLst/>
                           <a:latin typeface="Noto Sans" panose="020B0502040504020204" pitchFamily="34" charset="0"/>
                         </a:rPr>
-                        <a:t>6,879</a:t>
+                        <a:t>6,916</a:t>
                       </a:r>
                     </a:p>
                   </a:txBody>
@@ -40227,7 +40227,7 @@
                           <a:effectLst/>
                           <a:latin typeface="Noto Sans" panose="020B0502040504020204" pitchFamily="34" charset="0"/>
                         </a:rPr>
-                        <a:t>7,779</a:t>
+                        <a:t>7,821</a:t>
                       </a:r>
                     </a:p>
                   </a:txBody>
@@ -40464,7 +40464,7 @@
                           <a:effectLst/>
                           <a:latin typeface="Noto Sans" panose="020B0502040504020204" pitchFamily="34" charset="0"/>
                         </a:rPr>
-                        <a:t>27.4</a:t>
+                        <a:t>27.5</a:t>
                       </a:r>
                     </a:p>
                   </a:txBody>
@@ -40513,7 +40513,7 @@
                           <a:effectLst/>
                           <a:latin typeface="Noto Sans" panose="020B0502040504020204" pitchFamily="34" charset="0"/>
                         </a:rPr>
-                        <a:t>26.6</a:t>
+                        <a:t>26.7</a:t>
                       </a:r>
                     </a:p>
                   </a:txBody>
@@ -40559,7 +40559,7 @@
                           <a:effectLst/>
                           <a:latin typeface="Noto Sans" panose="020B0502040504020204" pitchFamily="34" charset="0"/>
                         </a:rPr>
-                        <a:t>25.4</a:t>
+                        <a:t>25.6</a:t>
                       </a:r>
                     </a:p>
                   </a:txBody>
@@ -40796,7 +40796,7 @@
                           <a:effectLst/>
                           <a:latin typeface="Noto Sans" panose="020B0502040504020204" pitchFamily="34" charset="0"/>
                         </a:rPr>
-                        <a:t>13.1</a:t>
+                        <a:t>13.0</a:t>
                       </a:r>
                     </a:p>
                   </a:txBody>
@@ -41485,7 +41485,7 @@
                           <a:effectLst/>
                           <a:latin typeface="Noto Sans" panose="020B0502040504020204" pitchFamily="34" charset="0"/>
                         </a:rPr>
-                        <a:t>91,879</a:t>
+                        <a:t>91,940</a:t>
                       </a:r>
                     </a:p>
                   </a:txBody>
@@ -41538,7 +41538,7 @@
                           <a:effectLst/>
                           <a:latin typeface="Noto Sans" panose="020B0502040504020204" pitchFamily="34" charset="0"/>
                         </a:rPr>
-                        <a:t>102,661</a:t>
+                        <a:t>102,790</a:t>
                       </a:r>
                     </a:p>
                   </a:txBody>
@@ -41588,7 +41588,7 @@
                           <a:effectLst/>
                           <a:latin typeface="Noto Sans" panose="020B0502040504020204" pitchFamily="34" charset="0"/>
                         </a:rPr>
-                        <a:t>114,915</a:t>
+                        <a:t>115,120</a:t>
                       </a:r>
                     </a:p>
                   </a:txBody>
@@ -41854,7 +41854,7 @@
                           <a:effectLst/>
                           <a:latin typeface="Noto Sans" panose="020B0502040504020204" pitchFamily="34" charset="0"/>
                         </a:rPr>
-                        <a:t>50,096</a:t>
+                        <a:t>50,157</a:t>
                       </a:r>
                     </a:p>
                   </a:txBody>
@@ -41907,7 +41907,7 @@
                           <a:effectLst/>
                           <a:latin typeface="Noto Sans" panose="020B0502040504020204" pitchFamily="34" charset="0"/>
                         </a:rPr>
-                        <a:t>58,016</a:t>
+                        <a:t>58,145</a:t>
                       </a:r>
                     </a:p>
                   </a:txBody>
@@ -41957,7 +41957,7 @@
                           <a:effectLst/>
                           <a:latin typeface="Noto Sans" panose="020B0502040504020204" pitchFamily="34" charset="0"/>
                         </a:rPr>
-                        <a:t>67,493</a:t>
+                        <a:t>67,699</a:t>
                       </a:r>
                     </a:p>
                   </a:txBody>
@@ -42214,7 +42214,7 @@
                           <a:effectLst/>
                           <a:latin typeface="Noto Sans" panose="020B0502040504020204" pitchFamily="34" charset="0"/>
                         </a:rPr>
-                        <a:t>25,074</a:t>
+                        <a:t>25,109</a:t>
                       </a:r>
                     </a:p>
                   </a:txBody>
@@ -42267,7 +42267,7 @@
                           <a:effectLst/>
                           <a:latin typeface="Noto Sans" panose="020B0502040504020204" pitchFamily="34" charset="0"/>
                         </a:rPr>
-                        <a:t>29,605</a:t>
+                        <a:t>29,681</a:t>
                       </a:r>
                     </a:p>
                   </a:txBody>
@@ -42317,7 +42317,7 @@
                           <a:effectLst/>
                           <a:latin typeface="Noto Sans" panose="020B0502040504020204" pitchFamily="34" charset="0"/>
                         </a:rPr>
-                        <a:t>35,036</a:t>
+                        <a:t>35,157</a:t>
                       </a:r>
                     </a:p>
                   </a:txBody>

--- a/MASVN_RS_WM_2H26_outlook_Equity_VN_2026_STBFPT_24July2026.pptx
+++ b/MASVN_RS_WM_2H26_outlook_Equity_VN_2026_STBFPT_24July2026.pptx
@@ -29681,7 +29681,7 @@
                 <a:ea typeface="Noto Sans" panose="020B0502040504020204" pitchFamily="34" charset="0"/>
                 <a:cs typeface="Noto Sans" panose="020B0502040504020204" pitchFamily="34" charset="0"/>
               </a:rPr>
-              <a:t>1H26 (cumulative): revenue VND 26,269bn (+12.6% YoY) and PBT VND 5,714bn (+18.1% YoY), completing 45%/49% of the FY26 revenue/PBT plan. 2Q26 alone: revenue VND 13,789bn, PBT VND 2,910bn (vs VND 12,480bn / VND 2,804bn in 1Q26) and NPATMI VND 2,568bn (+14% YoY). By segment (1H26): Technology revenue VND 23,138bn (+15% YoY; 88% of group revenue) and PBT VND 3,314bn (+16.9% YoY), with Global IT +13.4% and Domestic IT +22.5%; Education, investment &amp; others VND 3,131bn (-2.1% YoY).</a:t>
+              <a:t>Revenue VND 26,269bn (+12.6% YoY) and PBT VND 5,714bn (+18.1% YoY), completing 45%/49% of the FY26 revenue/PBT plan, with the group PBT margin widening to 21.8%. 2Q26 alone: revenue VND 13,789bn, PBT VND 2,910bn (vs VND 12,480bn / VND 2,804bn in 1Q26) and NPATMI VND 2,568bn (+14% YoY). By segment (1H26): Technology revenue VND 23,138bn (+15% YoY; 88% of group revenue) and PBT VND 3,314bn (+16.9% YoY) on a 14.3% margin, with Global IT +13.4% and Domestic IT +22.5%; Education, investment &amp; others revenue fell 2.1% to VND 3,131bn yet still delivered 42% of group PBT on a ~77% margin.</a:t>
             </a:r>
             <a:endParaRPr kumimoji="1" lang="en-US" altLang="ko-KR" sz="800" b="1" dirty="0">
               <a:solidFill>
@@ -29726,7 +29726,7 @@
                 <a:ea typeface="Noto Sans" panose="020B0502040504020204" pitchFamily="34" charset="0"/>
                 <a:cs typeface="Noto Sans" panose="020B0502040504020204" pitchFamily="34" charset="0"/>
               </a:rPr>
-              <a:t>Domestic IT was the fastest-growing segment in 6M26 at VND 4,236bn (+22.5% YoY), with segment PBT doubling YoY to VND 308bn, on public-sector project wins under the national digital-transformation programme — a multi-year pipeline far less exposed to the global IT-spending cycle. Global IT (VND 18,902bn, +13.4% YoY) is expected to reaccelerate to +16.7% in FY27F, led by Japan (+22%) and the EU (+18%), as AI and digital-transformation mandates convert into bookings. Education capacity (the Hue complex) and data-center expansion provide medium-term optionality.</a:t>
+              <a:t>Domestic IT was the fastest-growing segment in 6M26 at VND 4,236bn (+22.5% YoY), with segment PBT doubling YoY to VND 308bn, on public-sector project wins under the national digital-transformation programme — a multi-year pipeline far less exposed to the global IT-spending cycle, though at a 7.3% margin it remains the group's least profitable line, so the mix shift dilutes blended margins as it scales. Global IT (VND 18,902bn, +13.4% YoY) should reaccelerate to +16.7% in FY27F: we model Japan — 44% of the foreign book — at +22% in FY26F and +23% in FY27F and the EU at +18%/+20%, while trimming the US to +5.9% on bid-price competition and holding APAC at +7%. Education capacity (the Hue complex) and data-center expansion provide medium-term optionality.</a:t>
             </a:r>
             <a:endParaRPr kumimoji="1" lang="en-US" altLang="ko-KR" sz="800" b="1" dirty="0">
               <a:solidFill>
@@ -29771,7 +29771,7 @@
                 <a:ea typeface="Noto Sans" panose="020B0502040504020204" pitchFamily="34" charset="0"/>
                 <a:cs typeface="Noto Sans" panose="020B0502040504020204" pitchFamily="34" charset="0"/>
               </a:rPr>
-              <a:t>We forecast FY26F NPATMI of VND 10,943bn (+15.6% YoY), FY27F VND 12,518bn (+14.4% YoY) and FY28F VND 14,156bn (+13.1% YoY), with associate income from FPT Telecom assumed to grow ~15% p.a. Our DCF (FCFF)-based target price is VND 78,750; at the current price of VND 62,900 (24/07/26) FPT trades at 10.4x 2026F P/E versus a 5-year median above 18x, implying a 25% expected return (BUY). Risks: soft US/global IT spending, tariff-related deal delays, and JPY/USD FX swings.</a:t>
+              <a:t>We forecast FY26F NPATMI of VND 10,943bn (+15.6% YoY), FY27F VND 12,518bn (+14.4% YoY) and FY28F VND 14,156bn (+13.1% YoY), with associate income from FPT Telecom assumed to grow ~15% p.a.; net margin widens toward 20% and ROE holds near 27.5%. The balance sheet remains a support — net cash of roughly 60% of equity, cash building to ~VND 17.8tn by FY26F, interest cover above 15x and a maintained VND 2,000 DPS (~2% yield) — which limits the downside if bookings slow. Our DCF (FCFF)-based target price is VND 78,750; at the current price of VND 62,900 (24/07/26) FPT trades at 10.4x 2026F P/E against a 5-year median above 18x, implying a 25% expected return (BUY). Risks: soft US/global IT spending, tariff-related deal delays, and JPY/USD swings, material given Japan's 44% share of foreign revenue.</a:t>
             </a:r>
           </a:p>
           <a:p>
@@ -38009,7 +38009,7 @@
                 <a:ea typeface="Noto Sans" panose="020B0502040504020204" pitchFamily="34" charset="0"/>
                 <a:cs typeface="Noto Sans" panose="020B0502040504020204" pitchFamily="34" charset="0"/>
               </a:rPr>
-              <a:t>Lũy kế 1H26: doanh thu 26,269 tỷ đồng (+12.6% CK), LNTT 5,714 tỷ đồng (+18.1% CK), hoàn thành 45%/49% kế hoạch doanh thu/LNTT năm 2026. Riêng Q2/2026: doanh thu 13,789 tỷ đồng, LNTT 2,910 tỷ đồng (so với 12,480 tỷ / 2,804 tỷ trong Q1/2026), LNST-CĐTS 2,568 tỷ đồng (+14% CK). Theo mảng (1H26): khối Công nghệ đạt doanh thu 23,138 tỷ đồng (+15% CK; 88% doanh thu tập đoàn), LNTT 3,314 tỷ đồng (+16.9% CK); CNTT nước ngoài +13.4%, CNTT trong nước +22.5%; mảng Giáo dục, đầu tư &amp; khác đạt 3,131 tỷ đồng (-2.1% CK).</a:t>
+              <a:t>Doanh thu 26,269 tỷ đồng (+12.6% CK) và LNTT 5,714 tỷ đồng (+18.1% CK), hoàn thành 45%/49% kế hoạch doanh thu/LNTT năm 2026; biên LNTT toàn tập đoàn mở rộng lên 21.8%. Riêng Q2/2026: doanh thu 13,789 tỷ đồng, LNTT 2,910 tỷ đồng (so với 12,480 tỷ / 2,804 tỷ trong Q1/2026), LNST-CĐTS 2,568 tỷ đồng (+14% CK). Theo mảng (1H26): khối Công nghệ đạt doanh thu 23,138 tỷ đồng (+15% CK; 88% doanh thu tập đoàn), LNTT 3,314 tỷ đồng (+16.9% CK) với biên 14.3%; CNTT nước ngoài +13.4%, CNTT trong nước +22.5%. Mảng Giáo dục, đầu tư &amp; khác giảm 2.1% về 3,131 tỷ đồng nhưng vẫn đóng góp 42% LNTT tập đoàn với biên ~77%.</a:t>
             </a:r>
           </a:p>
           <a:p>
@@ -38046,7 +38046,7 @@
                 <a:ea typeface="Noto Sans" panose="020B0502040504020204" pitchFamily="34" charset="0"/>
                 <a:cs typeface="Noto Sans" panose="020B0502040504020204" pitchFamily="34" charset="0"/>
               </a:rPr>
-              <a:t>CNTT trong nước là mảng tăng trưởng nhanh nhất trong 6T26, đạt 4,236 tỷ đồng (+22.5% CK) với LNTT mảng tăng gấp đôi lên 308 tỷ đồng, nhờ trúng thầu các dự án khu vực công thuộc chương trình chuyển đổi số quốc gia — nguồn việc nhiều năm và ít chịu ảnh hưởng từ chu kỳ chi tiêu CNTT toàn cầu. CNTT nước ngoài (18,902 tỷ đồng, +13.4% CK) dự kiến tăng tốc trở lại lên +16.7% trong FY27F, dẫn dắt bởi Nhật Bản (+22%) và châu Âu (+18%) khi nhu cầu AI và chuyển đổi số chuyển hóa thành hợp đồng. Năng lực giáo dục (tổ hợp Huế) và mở rộng trung tâm dữ liệu tạo dư địa trung hạn.</a:t>
+              <a:t>CNTT trong nước tăng nhanh nhất trong 6T26, đạt 4,236 tỷ đồng (+22.5% CK) với LNTT mảng tăng gấp đôi lên 308 tỷ đồng, nhờ trúng thầu các dự án khu vực công thuộc chương trình chuyển đổi số quốc gia — nguồn việc nhiều năm và ít chịu ảnh hưởng từ chu kỳ chi tiêu CNTT toàn cầu, song với biên 7.3% đây vẫn là mảng có lợi nhuận thấp nhất, nên việc mở rộng sẽ pha loãng biên chung. CNTT nước ngoài (18,902 tỷ đồng, +13.4% CK) dự kiến tăng tốc lên +16.7% trong FY27F: chúng tôi giả định Nhật Bản — chiếm 44% doanh thu nước ngoài — tăng +22% FY26F và +23% FY27F, châu Âu +18%/+20%, hạ Mỹ về +5.9% do cạnh tranh giá thầu và giữ APAC ở +7%. Năng lực giáo dục (tổ hợp Huế) và mở rộng trung tâm dữ liệu tạo dư địa trung hạn.</a:t>
             </a:r>
           </a:p>
           <a:p>
@@ -38083,7 +38083,7 @@
                 <a:ea typeface="Noto Sans" panose="020B0502040504020204" pitchFamily="34" charset="0"/>
                 <a:cs typeface="Noto Sans" panose="020B0502040504020204" pitchFamily="34" charset="0"/>
               </a:rPr>
-              <a:t>Chúng tôi dự phóng LNST-CĐTS FY26F đạt 10,943 tỷ đồng (+15.6% CK), FY27F đạt 12,518 tỷ đồng (+14.4% CK) và FY28F đạt 14,156 tỷ đồng (+13.1% CK), với giả định lợi nhuận từ FPT Telecom tăng ~15%/năm. Giá mục tiêu theo DCF (FCFF) là 78,750 đồng/cp; tại thị giá 62,900 đồng (24/07/26), FPT giao dịch ở mức 10.4x P/E 2026F so với trung vị 5 năm trên 18x, tương ứng lợi nhuận kỳ vọng 25% (MUA). Rủi ro: chi tiêu CNTT tại Mỹ/toàn cầu suy yếu, trì hoãn hợp đồng do thuế quan, biến động tỷ giá JPY/USD.</a:t>
+              <a:t>Chúng tôi dự phóng LNST-CĐTS FY26F đạt 10,943 tỷ đồng (+15.6% CK), FY27F 12,518 tỷ đồng (+14.4% CK) và FY28F 14,156 tỷ đồng (+13.1% CK), với giả định lợi nhuận từ FPT Telecom tăng ~15%/năm; biên LN ròng mở rộng về ~20% và ROE duy trì quanh 27.5%. Bảng cân đối vẫn là điểm tựa — tiền ròng tương đương ~60% VCSH, tiền tăng lên ~17.8 nghìn tỷ đồng vào FY26F, hệ số chi trả lãi trên 15 lần và cổ tức 2,000 đồng/cp (~2%) — giúp hạn chế rủi ro giảm nếu đơn hàng chậm lại. Giá mục tiêu theo DCF (FCFF) là 78,750 đồng/cp; tại thị giá 62,900 đồng (24/07/26), FPT giao dịch ở 10.4x P/E 2026F so với trung vị 5 năm trên 18x, tương ứng lợi nhuận kỳ vọng 25% (MUA). Rủi ro: chi tiêu CNTT tại Mỹ/toàn cầu suy yếu, trì hoãn hợp đồng do thuế quan, biến động JPY/USD — đáng lưu ý khi Nhật Bản chiếm 44% doanh thu nước ngoài.</a:t>
             </a:r>
             <a:endParaRPr kumimoji="1" lang="en-US" altLang="ko-KR" sz="800" b="0" dirty="0">
               <a:solidFill>

--- a/MASVN_RS_WM_2H26_outlook_Equity_VN_2026_STBFPT_24July2026.pptx
+++ b/MASVN_RS_WM_2H26_outlook_Equity_VN_2026_STBFPT_24July2026.pptx
@@ -29681,7 +29681,7 @@
                 <a:ea typeface="Noto Sans" panose="020B0502040504020204" pitchFamily="34" charset="0"/>
                 <a:cs typeface="Noto Sans" panose="020B0502040504020204" pitchFamily="34" charset="0"/>
               </a:rPr>
-              <a:t>Revenue VND 26,269bn (+12.6% YoY) and PBT VND 5,714bn (+18.1% YoY), completing 45%/49% of the FY26 revenue/PBT plan, with the group PBT margin widening to 21.8%. 2Q26 alone: revenue VND 13,789bn, PBT VND 2,910bn (vs VND 12,480bn / VND 2,804bn in 1Q26) and NPATMI VND 2,568bn (+14% YoY). By segment (1H26): Technology revenue VND 23,138bn (+15% YoY; 88% of group revenue) and PBT VND 3,314bn (+16.9% YoY) on a 14.3% margin, with Global IT +13.4% and Domestic IT +22.5%; Education, investment &amp; others revenue fell 2.1% to VND 3,131bn yet still delivered 42% of group PBT on a ~77% margin.</a:t>
+              <a:t>Revenue VND 26,269bn (+12.6% YoY) and PBT VND 5,714bn (+18.1% YoY), completing 45%/49% of the FY26 revenue/PBT plan, with the group PBT margin widening to 21.8%. 2Q26 alone: revenue VND 13,789bn, PBT VND 2,910bn and NPATMI VND 2,568bn (+14% YoY). By segment: Technology revenue VND 23,138bn (+15% YoY; 88% of group) and PBT VND 3,314bn (+16.9% YoY) on a 14.3% margin, with Global IT +13.4% and Domestic IT +22.5%; Education, investment &amp; others revenue fell 2.1% to VND 3,131bn yet still delivered 42% of group PBT on a ~77% margin.</a:t>
             </a:r>
             <a:endParaRPr kumimoji="1" lang="en-US" altLang="ko-KR" sz="800" b="1" dirty="0">
               <a:solidFill>
@@ -29726,7 +29726,7 @@
                 <a:ea typeface="Noto Sans" panose="020B0502040504020204" pitchFamily="34" charset="0"/>
                 <a:cs typeface="Noto Sans" panose="020B0502040504020204" pitchFamily="34" charset="0"/>
               </a:rPr>
-              <a:t>Domestic IT was the fastest-growing segment in 6M26 at VND 4,236bn (+22.5% YoY), with segment PBT doubling YoY to VND 308bn, on public-sector project wins under the national digital-transformation programme — a multi-year pipeline far less exposed to the global IT-spending cycle, though at a 7.3% margin it remains the group's least profitable line, so the mix shift dilutes blended margins as it scales. Global IT (VND 18,902bn, +13.4% YoY) should reaccelerate to +16.7% in FY27F: we model Japan — 44% of the foreign book — at +22% in FY26F and +23% in FY27F and the EU at +18%/+20%, while trimming the US to +5.9% on bid-price competition and holding APAC at +7%. Education capacity (the Hue complex) and data-center expansion provide medium-term optionality.</a:t>
+              <a:t>Domestic IT was the fastest-growing segment in 6M26 at VND 4,236bn (+22.5% YoY), segment PBT doubling to VND 308bn, on public-sector wins under the national digital-transformation programme — multi-year work far less exposed to the global IT cycle, though its 7.3% margin dilutes the blend as it scales. Global IT (VND 18,902bn, +13.4% YoY) should reaccelerate to +16.7% in FY27F, led by Japan — 44% of the foreign book — at +22%/+23% and the EU at +18%/+20%, with the US trimmed to +5.9% on bid-price competition.</a:t>
             </a:r>
             <a:endParaRPr kumimoji="1" lang="en-US" altLang="ko-KR" sz="800" b="1" dirty="0">
               <a:solidFill>
@@ -29736,6 +29736,43 @@
               <a:ea typeface="Noto Sans" panose="020B0502040504020204" pitchFamily="34" charset="0"/>
               <a:cs typeface="Noto Sans" panose="020B0502040504020204" pitchFamily="34" charset="0"/>
             </a:endParaRPr>
+          </a:p>
+          <a:p>
+            <a:pPr algn="just" fontAlgn="ctr">
+              <a:lnSpc>
+                <a:spcPts val="1200"/>
+              </a:lnSpc>
+              <a:spcBef>
+                <a:spcPct val="0"/>
+              </a:spcBef>
+              <a:spcAft>
+                <a:spcPts val="600"/>
+              </a:spcAft>
+              <a:buSzPct val="130000"/>
+              <a:defRPr/>
+            </a:pPr>
+            <a:r>
+              <a:rPr kumimoji="1" lang="en-US" altLang="ko-KR" sz="800" b="1" dirty="0">
+                <a:solidFill>
+                  <a:srgbClr val="000000"/>
+                </a:solidFill>
+                <a:latin typeface="Noto Sans" panose="020B0502040504020204" pitchFamily="34" charset="0"/>
+                <a:ea typeface="Noto Sans" panose="020B0502040504020204" pitchFamily="34" charset="0"/>
+                <a:cs typeface="Noto Sans" panose="020B0502040504020204" pitchFamily="34" charset="0"/>
+              </a:rPr>
+              <a:t>Why the stock sits at a two-year low: </a:t>
+            </a:r>
+            <a:r>
+              <a:rPr kumimoji="1" lang="en-US" altLang="ko-KR" sz="800" dirty="0">
+                <a:solidFill>
+                  <a:srgbClr val="000000"/>
+                </a:solidFill>
+                <a:latin typeface="Noto Sans" panose="020B0502040504020204" pitchFamily="34" charset="0"/>
+                <a:ea typeface="Noto Sans" panose="020B0502040504020204" pitchFamily="34" charset="0"/>
+                <a:cs typeface="Noto Sans" panose="020B0502040504020204" pitchFamily="34" charset="0"/>
+              </a:rPr>
+              <a:t>FPT closed at VND 62,900 on 24/07, its lowest since October 2023 — down ~10% in July and ~40% YTD, erasing ~VND114tn (~US$4.4bn) from its peak market value and dropping the company out of the exchange's top 10. The dominant driver is foreign selling — net outflows of ~VND16.8tn YTD, the largest of any listed stock — alongside concern over slowing global IT-services growth. Newsflow has run the other way: an expanded AI partnership with Microsoft across ASEAN, Japan and Korea (25/06); an AI contract worth tens of millions of USD with a European materials group; six AI agreements in Thailand and Singapore; three digital and quantum-technology agreements with Hanoi (29/06); and data-intermediary certification plus a cooperation deal with the Ministry of Public Security's National Data Centre (15/07).</a:t>
+            </a:r>
           </a:p>
           <a:p>
             <a:pPr algn="just" fontAlgn="ctr">
@@ -29771,8 +29808,16 @@
                 <a:ea typeface="Noto Sans" panose="020B0502040504020204" pitchFamily="34" charset="0"/>
                 <a:cs typeface="Noto Sans" panose="020B0502040504020204" pitchFamily="34" charset="0"/>
               </a:rPr>
-              <a:t>We forecast FY26F NPATMI of VND 10,943bn (+15.6% YoY), FY27F VND 12,518bn (+14.4% YoY) and FY28F VND 14,156bn (+13.1% YoY), with associate income from FPT Telecom assumed to grow ~15% p.a.; net margin widens toward 20% and ROE holds near 27.5%. The balance sheet remains a support — net cash of roughly 60% of equity, cash building to ~VND 17.8tn by FY26F, interest cover above 15x and a maintained VND 2,000 DPS (~2% yield) — which limits the downside if bookings slow. Our DCF (FCFF)-based target price is VND 78,750; at the current price of VND 62,900 (24/07/26) FPT trades at 10.4x 2026F P/E against a 5-year median above 18x, implying a 25% expected return (BUY). Risks: soft US/global IT spending, tariff-related deal delays, and JPY/USD swings, material given Japan's 44% share of foreign revenue.</a:t>
+              <a:t>We forecast FY26F NPATMI of VND 10,943bn (+15.6% YoY), FY27F VND 12,518bn (+14.4% YoY) and FY28F VND 14,156bn (+13.1% YoY), assuming FPT Telecom associate income grows ~15% p.a.; net margin widens toward 20% and ROE holds near 27.5%, backed by net cash of ~60% of equity and a maintained VND 2,000 DPS. Our DCF (FCFF)-based target price is VND 78,750; at VND 62,900 FPT trades at 10.4x 2026F P/E against a 5-year median above 18x, implying 25% upside (BUY). Risks: soft US/global IT spending, tariff-related delays and JPY/USD swings.</a:t>
             </a:r>
+            <a:endParaRPr kumimoji="1" lang="en-US" altLang="ko-KR" sz="800" b="1" dirty="0">
+              <a:solidFill>
+                <a:srgbClr val="000000"/>
+              </a:solidFill>
+              <a:latin typeface="Noto Sans" panose="020B0502040504020204" pitchFamily="34" charset="0"/>
+              <a:ea typeface="Noto Sans" panose="020B0502040504020204" pitchFamily="34" charset="0"/>
+              <a:cs typeface="Noto Sans" panose="020B0502040504020204" pitchFamily="34" charset="0"/>
+            </a:endParaRPr>
           </a:p>
           <a:p>
             <a:pPr algn="just" fontAlgn="ctr">
@@ -38009,7 +38054,7 @@
                 <a:ea typeface="Noto Sans" panose="020B0502040504020204" pitchFamily="34" charset="0"/>
                 <a:cs typeface="Noto Sans" panose="020B0502040504020204" pitchFamily="34" charset="0"/>
               </a:rPr>
-              <a:t>Doanh thu 26,269 tỷ đồng (+12.6% CK) và LNTT 5,714 tỷ đồng (+18.1% CK), hoàn thành 45%/49% kế hoạch doanh thu/LNTT năm 2026; biên LNTT toàn tập đoàn mở rộng lên 21.8%. Riêng Q2/2026: doanh thu 13,789 tỷ đồng, LNTT 2,910 tỷ đồng (so với 12,480 tỷ / 2,804 tỷ trong Q1/2026), LNST-CĐTS 2,568 tỷ đồng (+14% CK). Theo mảng (1H26): khối Công nghệ đạt doanh thu 23,138 tỷ đồng (+15% CK; 88% doanh thu tập đoàn), LNTT 3,314 tỷ đồng (+16.9% CK) với biên 14.3%; CNTT nước ngoài +13.4%, CNTT trong nước +22.5%. Mảng Giáo dục, đầu tư &amp; khác giảm 2.1% về 3,131 tỷ đồng nhưng vẫn đóng góp 42% LNTT tập đoàn với biên ~77%.</a:t>
+              <a:t>Doanh thu 26,269 tỷ đồng (+12.6% CK) và LNTT 5,714 tỷ đồng (+18.1% CK), hoàn thành 45%/49% kế hoạch năm; biên LNTT toàn tập đoàn mở rộng lên 21.8%. Riêng Q2/2026: doanh thu 13,789 tỷ đồng, LNTT 2,910 tỷ đồng, LNST-CĐTS 2,568 tỷ đồng (+14% CK). Theo mảng: Công nghệ đạt 23,138 tỷ đồng (+15% CK; 88% doanh thu tập đoàn), LNTT 3,314 tỷ đồng (+16.9% CK) với biên 14.3%; CNTT nước ngoài +13.4%, trong nước +22.5%. Giáo dục, đầu tư &amp; khác giảm 2.1% về 3,131 tỷ đồng nhưng vẫn đóng góp 42% LNTT tập đoàn với biên ~77%.</a:t>
             </a:r>
           </a:p>
           <a:p>
@@ -38035,7 +38080,7 @@
                 <a:ea typeface="Noto Sans" panose="020B0502040504020204" pitchFamily="34" charset="0"/>
                 <a:cs typeface="Noto Sans" panose="020B0502040504020204" pitchFamily="34" charset="0"/>
               </a:rPr>
-              <a:t>Số hóa khu vực công dẫn dắt danh mục dự án trong nước: </a:t>
+              <a:t>Số hóa khu vực công dẫn dắt danh mục trong nước: </a:t>
             </a:r>
             <a:r>
               <a:rPr kumimoji="1" lang="vi-VN" altLang="ko-KR" sz="800" b="0" dirty="0">
@@ -38046,7 +38091,7 @@
                 <a:ea typeface="Noto Sans" panose="020B0502040504020204" pitchFamily="34" charset="0"/>
                 <a:cs typeface="Noto Sans" panose="020B0502040504020204" pitchFamily="34" charset="0"/>
               </a:rPr>
-              <a:t>CNTT trong nước tăng nhanh nhất trong 6T26, đạt 4,236 tỷ đồng (+22.5% CK) với LNTT mảng tăng gấp đôi lên 308 tỷ đồng, nhờ trúng thầu các dự án khu vực công thuộc chương trình chuyển đổi số quốc gia — nguồn việc nhiều năm và ít chịu ảnh hưởng từ chu kỳ chi tiêu CNTT toàn cầu, song với biên 7.3% đây vẫn là mảng có lợi nhuận thấp nhất, nên việc mở rộng sẽ pha loãng biên chung. CNTT nước ngoài (18,902 tỷ đồng, +13.4% CK) dự kiến tăng tốc lên +16.7% trong FY27F: chúng tôi giả định Nhật Bản — chiếm 44% doanh thu nước ngoài — tăng +22% FY26F và +23% FY27F, châu Âu +18%/+20%, hạ Mỹ về +5.9% do cạnh tranh giá thầu và giữ APAC ở +7%. Năng lực giáo dục (tổ hợp Huế) và mở rộng trung tâm dữ liệu tạo dư địa trung hạn.</a:t>
+              <a:t>CNTT trong nước tăng nhanh nhất trong 6T26, đạt 4,236 tỷ đồng (+22.5% CK), LNTT mảng tăng gấp đôi lên 308 tỷ đồng nhờ trúng thầu khu vực công thuộc chương trình chuyển đổi số quốc gia — nguồn việc nhiều năm, ít phụ thuộc chu kỳ CNTT toàn cầu, song biên 7.3% sẽ pha loãng biên chung khi mở rộng. CNTT nước ngoài (18,902 tỷ đồng, +13.4% CK) dự kiến tăng tốc lên +16.7% trong FY27F, dẫn dắt bởi Nhật Bản — 44% doanh thu nước ngoài — ở +22%/+23% và châu Âu +18%/+20%, trong khi Mỹ hạ về +5.9% do cạnh tranh giá thầu.</a:t>
             </a:r>
           </a:p>
           <a:p>
@@ -38057,6 +38102,48 @@
               <a:spcBef>
                 <a:spcPct val="0"/>
               </a:spcBef>
+              <a:spcAft>
+                <a:spcPts val="600"/>
+              </a:spcAft>
+              <a:buSzPct val="130000"/>
+              <a:defRPr/>
+            </a:pPr>
+            <a:r>
+              <a:rPr kumimoji="1" lang="vi-VN" altLang="ko-KR" sz="800" b="1" dirty="0">
+                <a:solidFill>
+                  <a:srgbClr val="000000"/>
+                </a:solidFill>
+                <a:latin typeface="Noto Sans" panose="020B0502040504020204" pitchFamily="34" charset="0"/>
+                <a:ea typeface="Noto Sans" panose="020B0502040504020204" pitchFamily="34" charset="0"/>
+                <a:cs typeface="Noto Sans" panose="020B0502040504020204" pitchFamily="34" charset="0"/>
+              </a:rPr>
+              <a:t>Vì sao cổ phiếu về đáy 2 năm: </a:t>
+            </a:r>
+            <a:r>
+              <a:rPr kumimoji="1" lang="vi-VN" altLang="ko-KR" sz="800" b="0" dirty="0">
+                <a:solidFill>
+                  <a:srgbClr val="000000"/>
+                </a:solidFill>
+                <a:latin typeface="Noto Sans" panose="020B0502040504020204" pitchFamily="34" charset="0"/>
+                <a:ea typeface="Noto Sans" panose="020B0502040504020204" pitchFamily="34" charset="0"/>
+                <a:cs typeface="Noto Sans" panose="020B0502040504020204" pitchFamily="34" charset="0"/>
+              </a:rPr>
+              <a:t>FPT đóng cửa 62,900 đồng ngày 24/07, thấp nhất kể từ tháng 10/2023 — giảm ~10% trong tháng 7 và ~40% từ đầu năm, tương ứng ~114 nghìn tỷ đồng (~4.4 tỷ USD) vốn hóa bị xóa so với đỉnh và đưa FPT rời Top 10 sàn. Nguyên nhân chính là khối ngoại bán ròng ~16.8 nghìn tỷ đồng từ đầu năm, lớn nhất toàn sàn, cùng lo ngại tăng trưởng dịch vụ CNTT toàn cầu chậm lại. Ngược lại, thông tin doanh nghiệp khá tích cực: mở rộng hợp tác AI với Microsoft tại ASEAN, Nhật Bản và Hàn Quốc (25/06); hợp đồng AI hàng chục triệu USD với tập đoàn vật liệu châu Âu; 6 thỏa thuận AI tại Thái Lan và Singapore; 3 thỏa thuận chuyển đổi số và công nghệ lượng tử với Hà Nội (29/06); và chứng nhận trung gian dữ liệu cùng hợp tác Trung tâm Dữ liệu quốc gia — Bộ Công an (15/07).</a:t>
+            </a:r>
+            <a:endParaRPr kumimoji="1" lang="en-US" altLang="ko-KR" sz="800" b="0" dirty="0">
+              <a:solidFill>
+                <a:srgbClr val="000000"/>
+              </a:solidFill>
+              <a:latin typeface="Noto Sans" panose="020B0502040504020204" pitchFamily="34" charset="0"/>
+              <a:ea typeface="Noto Sans" panose="020B0502040504020204" pitchFamily="34" charset="0"/>
+              <a:cs typeface="Noto Sans" panose="020B0502040504020204" pitchFamily="34" charset="0"/>
+            </a:endParaRPr>
+          </a:p>
+          <a:p>
+            <a:pPr algn="just" fontAlgn="ctr">
+              <a:lnSpc>
+                <a:spcPts val="1200"/>
+              </a:lnSpc>
               <a:spcAft>
                 <a:spcPts val="600"/>
               </a:spcAft>
@@ -38083,16 +38170,8 @@
                 <a:ea typeface="Noto Sans" panose="020B0502040504020204" pitchFamily="34" charset="0"/>
                 <a:cs typeface="Noto Sans" panose="020B0502040504020204" pitchFamily="34" charset="0"/>
               </a:rPr>
-              <a:t>Chúng tôi dự phóng LNST-CĐTS FY26F đạt 10,943 tỷ đồng (+15.6% CK), FY27F 12,518 tỷ đồng (+14.4% CK) và FY28F 14,156 tỷ đồng (+13.1% CK), với giả định lợi nhuận từ FPT Telecom tăng ~15%/năm; biên LN ròng mở rộng về ~20% và ROE duy trì quanh 27.5%. Bảng cân đối vẫn là điểm tựa — tiền ròng tương đương ~60% VCSH, tiền tăng lên ~17.8 nghìn tỷ đồng vào FY26F, hệ số chi trả lãi trên 15 lần và cổ tức 2,000 đồng/cp (~2%) — giúp hạn chế rủi ro giảm nếu đơn hàng chậm lại. Giá mục tiêu theo DCF (FCFF) là 78,750 đồng/cp; tại thị giá 62,900 đồng (24/07/26), FPT giao dịch ở 10.4x P/E 2026F so với trung vị 5 năm trên 18x, tương ứng lợi nhuận kỳ vọng 25% (MUA). Rủi ro: chi tiêu CNTT tại Mỹ/toàn cầu suy yếu, trì hoãn hợp đồng do thuế quan, biến động JPY/USD — đáng lưu ý khi Nhật Bản chiếm 44% doanh thu nước ngoài.</a:t>
+              <a:t>Chúng tôi dự phóng LNST-CĐTS FY26F đạt 10,943 tỷ đồng (+15.6% CK), FY27F 12,518 tỷ đồng (+14.4% CK) và FY28F 14,156 tỷ đồng (+13.1% CK), giả định lợi nhuận từ FPT Telecom tăng ~15%/năm; biên LN ròng mở rộng về ~20% và ROE quanh 27.5%, với tiền ròng ~60% VCSH và cổ tức 2,000 đồng/cp. Giá mục tiêu DCF (FCFF) là 78,750 đồng/cp; tại 62,900 đồng, FPT giao dịch ở 10.4x P/E 2026F so với trung vị 5 năm trên 18x, tương ứng 25% tiềm năng tăng (MUA). Rủi ro: chi tiêu CNTT Mỹ/toàn cầu yếu, trì hoãn do thuế quan, biến động JPY/USD.</a:t>
             </a:r>
-            <a:endParaRPr kumimoji="1" lang="en-US" altLang="ko-KR" sz="800" b="0" dirty="0">
-              <a:solidFill>
-                <a:srgbClr val="000000"/>
-              </a:solidFill>
-              <a:latin typeface="Noto Sans" panose="020B0502040504020204" pitchFamily="34" charset="0"/>
-              <a:ea typeface="Noto Sans" panose="020B0502040504020204" pitchFamily="34" charset="0"/>
-              <a:cs typeface="Noto Sans" panose="020B0502040504020204" pitchFamily="34" charset="0"/>
-            </a:endParaRPr>
           </a:p>
         </p:txBody>
       </p:sp>
